--- a/Ekonometria przestrzenna.pptx
+++ b/Ekonometria przestrzenna.pptx
@@ -5,30 +5,33 @@
     <p:sldMasterId id="2147483666" r:id="rId4"/>
   </p:sldMasterIdLst>
   <p:notesMasterIdLst>
-    <p:notesMasterId r:id="rId23"/>
+    <p:notesMasterId r:id="rId26"/>
   </p:notesMasterIdLst>
   <p:handoutMasterIdLst>
-    <p:handoutMasterId r:id="rId24"/>
+    <p:handoutMasterId r:id="rId27"/>
   </p:handoutMasterIdLst>
   <p:sldIdLst>
     <p:sldId id="256" r:id="rId5"/>
-    <p:sldId id="277" r:id="rId6"/>
-    <p:sldId id="261" r:id="rId7"/>
-    <p:sldId id="295" r:id="rId8"/>
-    <p:sldId id="296" r:id="rId9"/>
-    <p:sldId id="298" r:id="rId10"/>
-    <p:sldId id="299" r:id="rId11"/>
-    <p:sldId id="278" r:id="rId12"/>
-    <p:sldId id="266" r:id="rId13"/>
-    <p:sldId id="300" r:id="rId14"/>
-    <p:sldId id="301" r:id="rId15"/>
-    <p:sldId id="302" r:id="rId16"/>
-    <p:sldId id="303" r:id="rId17"/>
-    <p:sldId id="304" r:id="rId18"/>
-    <p:sldId id="305" r:id="rId19"/>
-    <p:sldId id="306" r:id="rId20"/>
-    <p:sldId id="307" r:id="rId21"/>
-    <p:sldId id="308" r:id="rId22"/>
+    <p:sldId id="309" r:id="rId6"/>
+    <p:sldId id="310" r:id="rId7"/>
+    <p:sldId id="311" r:id="rId8"/>
+    <p:sldId id="277" r:id="rId9"/>
+    <p:sldId id="261" r:id="rId10"/>
+    <p:sldId id="295" r:id="rId11"/>
+    <p:sldId id="296" r:id="rId12"/>
+    <p:sldId id="298" r:id="rId13"/>
+    <p:sldId id="299" r:id="rId14"/>
+    <p:sldId id="278" r:id="rId15"/>
+    <p:sldId id="266" r:id="rId16"/>
+    <p:sldId id="300" r:id="rId17"/>
+    <p:sldId id="301" r:id="rId18"/>
+    <p:sldId id="302" r:id="rId19"/>
+    <p:sldId id="303" r:id="rId20"/>
+    <p:sldId id="304" r:id="rId21"/>
+    <p:sldId id="305" r:id="rId22"/>
+    <p:sldId id="306" r:id="rId23"/>
+    <p:sldId id="307" r:id="rId24"/>
+    <p:sldId id="308" r:id="rId25"/>
   </p:sldIdLst>
   <p:sldSz cx="12192000" cy="6858000"/>
   <p:notesSz cx="6858000" cy="9144000"/>
@@ -255,7 +258,7 @@
           <a:p>
             <a:fld id="{F352A77B-D33C-49B3-A83C-450AA2ED72B3}" type="datetimeFigureOut">
               <a:rPr lang="en-US" smtClean="0"/>
-              <a:t>5/8/2025</a:t>
+              <a:t>6/2/2025</a:t>
             </a:fld>
             <a:endParaRPr lang="en-US" dirty="0"/>
           </a:p>
@@ -432,7 +435,7 @@
           <a:p>
             <a:fld id="{E38D8F9A-F5CB-4EF8-A859-ED5E107B9763}" type="datetimeFigureOut">
               <a:rPr lang="en-US" smtClean="0"/>
-              <a:t>5/8/2025</a:t>
+              <a:t>6/2/2025</a:t>
             </a:fld>
             <a:endParaRPr lang="en-US" dirty="0"/>
           </a:p>
@@ -15997,7 +16000,7 @@
         </p:nvSpPr>
         <p:spPr>
           <a:xfrm>
-            <a:off x="6416040" y="4434840"/>
+            <a:off x="6896487" y="4023058"/>
             <a:ext cx="4941771" cy="1122202"/>
           </a:xfrm>
         </p:spPr>
@@ -16031,7 +16034,7 @@
         </p:nvSpPr>
         <p:spPr>
           <a:xfrm>
-            <a:off x="6416041" y="5586890"/>
+            <a:off x="6896488" y="6245568"/>
             <a:ext cx="4941770" cy="396660"/>
           </a:xfrm>
         </p:spPr>
@@ -16044,6 +16047,127 @@
               <a:t>Izabela Reszka, Piotr Wiśniewski, Klaudia Woźniak</a:t>
             </a:r>
             <a:endParaRPr lang="en-US" dirty="0"/>
+          </a:p>
+        </p:txBody>
+      </p:sp>
+      <p:pic>
+        <p:nvPicPr>
+          <p:cNvPr id="1026" name="Picture 2">
+            <a:extLst>
+              <a:ext uri="{FF2B5EF4-FFF2-40B4-BE49-F238E27FC236}">
+                <a16:creationId xmlns:a16="http://schemas.microsoft.com/office/drawing/2014/main" id="{293E9FF9-4110-D16C-751A-CDFD316846B3}"/>
+              </a:ext>
+            </a:extLst>
+          </p:cNvPr>
+          <p:cNvPicPr>
+            <a:picLocks noChangeAspect="1" noChangeArrowheads="1"/>
+          </p:cNvPicPr>
+          <p:nvPr/>
+        </p:nvPicPr>
+        <p:blipFill>
+          <a:blip r:embed="rId2">
+            <a:extLst>
+              <a:ext uri="{28A0092B-C50C-407E-A947-70E740481C1C}">
+                <a14:useLocalDpi xmlns:a14="http://schemas.microsoft.com/office/drawing/2010/main" val="0"/>
+              </a:ext>
+            </a:extLst>
+          </a:blip>
+          <a:srcRect/>
+          <a:stretch>
+            <a:fillRect/>
+          </a:stretch>
+        </p:blipFill>
+        <p:spPr bwMode="auto">
+          <a:xfrm>
+            <a:off x="136338" y="5785220"/>
+            <a:ext cx="4619625" cy="952500"/>
+          </a:xfrm>
+          <a:prstGeom prst="rect">
+            <a:avLst/>
+          </a:prstGeom>
+          <a:noFill/>
+          <a:extLst>
+            <a:ext uri="{909E8E84-426E-40DD-AFC4-6F175D3DCCD1}">
+              <a14:hiddenFill xmlns:a14="http://schemas.microsoft.com/office/drawing/2010/main">
+                <a:solidFill>
+                  <a:srgbClr val="FFFFFF"/>
+                </a:solidFill>
+              </a14:hiddenFill>
+            </a:ext>
+          </a:extLst>
+        </p:spPr>
+      </p:pic>
+      <p:sp>
+        <p:nvSpPr>
+          <p:cNvPr id="4" name="pole tekstowe 3">
+            <a:extLst>
+              <a:ext uri="{FF2B5EF4-FFF2-40B4-BE49-F238E27FC236}">
+                <a16:creationId xmlns:a16="http://schemas.microsoft.com/office/drawing/2014/main" id="{3CB978E5-08E7-C1B8-2C80-B95ED145A752}"/>
+              </a:ext>
+            </a:extLst>
+          </p:cNvPr>
+          <p:cNvSpPr txBox="1"/>
+          <p:nvPr/>
+        </p:nvSpPr>
+        <p:spPr>
+          <a:xfrm>
+            <a:off x="6896487" y="3653726"/>
+            <a:ext cx="3572618" cy="369332"/>
+          </a:xfrm>
+          <a:prstGeom prst="rect">
+            <a:avLst/>
+          </a:prstGeom>
+          <a:noFill/>
+        </p:spPr>
+        <p:txBody>
+          <a:bodyPr wrap="square" rtlCol="0">
+            <a:spAutoFit/>
+          </a:bodyPr>
+          <a:lstStyle/>
+          <a:p>
+            <a:r>
+              <a:rPr lang="pl-PL" dirty="0"/>
+              <a:t>Analityka Gospodarcza II</a:t>
+            </a:r>
+          </a:p>
+        </p:txBody>
+      </p:sp>
+      <p:sp>
+        <p:nvSpPr>
+          <p:cNvPr id="5" name="pole tekstowe 4">
+            <a:extLst>
+              <a:ext uri="{FF2B5EF4-FFF2-40B4-BE49-F238E27FC236}">
+                <a16:creationId xmlns:a16="http://schemas.microsoft.com/office/drawing/2014/main" id="{DAA42544-65BA-4D44-5162-DD564A9F3B4F}"/>
+              </a:ext>
+            </a:extLst>
+          </p:cNvPr>
+          <p:cNvSpPr txBox="1"/>
+          <p:nvPr/>
+        </p:nvSpPr>
+        <p:spPr>
+          <a:xfrm>
+            <a:off x="6896487" y="5233749"/>
+            <a:ext cx="4757980" cy="923330"/>
+          </a:xfrm>
+          <a:prstGeom prst="rect">
+            <a:avLst/>
+          </a:prstGeom>
+          <a:noFill/>
+        </p:spPr>
+        <p:txBody>
+          <a:bodyPr wrap="square" rtlCol="0">
+            <a:spAutoFit/>
+          </a:bodyPr>
+          <a:lstStyle/>
+          <a:p>
+            <a:r>
+              <a:rPr lang="pl-PL" b="1" i="1" dirty="0">
+                <a:solidFill>
+                  <a:srgbClr val="00B050"/>
+                </a:solidFill>
+              </a:rPr>
+              <a:t>Przestrzenne zróżnicowanie statusu społeczno-ekonomicznego uczniów w krajach uczestniczących w badaniu PISA (2012–2018)</a:t>
+            </a:r>
           </a:p>
         </p:txBody>
       </p:sp>
@@ -16061,6 +16185,889 @@
 </file>
 
 <file path=ppt/slides/slide10.xml><?xml version="1.0" encoding="utf-8"?>
+<p:sld xmlns:a="http://schemas.openxmlformats.org/drawingml/2006/main" xmlns:r="http://schemas.openxmlformats.org/officeDocument/2006/relationships" xmlns:p="http://schemas.openxmlformats.org/presentationml/2006/main">
+  <p:cSld>
+    <p:spTree>
+      <p:nvGrpSpPr>
+        <p:cNvPr id="1" name="">
+          <a:extLst>
+            <a:ext uri="{FF2B5EF4-FFF2-40B4-BE49-F238E27FC236}">
+              <a16:creationId xmlns:a16="http://schemas.microsoft.com/office/drawing/2014/main" id="{2532C971-BB57-606A-92DA-F29331ACB2B0}"/>
+            </a:ext>
+          </a:extLst>
+        </p:cNvPr>
+        <p:cNvGrpSpPr/>
+        <p:nvPr/>
+      </p:nvGrpSpPr>
+      <p:grpSpPr>
+        <a:xfrm>
+          <a:off x="0" y="0"/>
+          <a:ext cx="0" cy="0"/>
+          <a:chOff x="0" y="0"/>
+          <a:chExt cx="0" cy="0"/>
+        </a:xfrm>
+      </p:grpSpPr>
+      <p:sp>
+        <p:nvSpPr>
+          <p:cNvPr id="2" name="Title 1">
+            <a:extLst>
+              <a:ext uri="{FF2B5EF4-FFF2-40B4-BE49-F238E27FC236}">
+                <a16:creationId xmlns:a16="http://schemas.microsoft.com/office/drawing/2014/main" id="{D1040F5B-CCC3-A940-6D81-F98B6477A801}"/>
+              </a:ext>
+            </a:extLst>
+          </p:cNvPr>
+          <p:cNvSpPr>
+            <a:spLocks noGrp="1"/>
+          </p:cNvSpPr>
+          <p:nvPr>
+            <p:ph type="title"/>
+          </p:nvPr>
+        </p:nvSpPr>
+        <p:spPr>
+          <a:xfrm>
+            <a:off x="1508760" y="4156405"/>
+            <a:ext cx="3139440" cy="1325563"/>
+          </a:xfrm>
+        </p:spPr>
+        <p:txBody>
+          <a:bodyPr/>
+          <a:lstStyle/>
+          <a:p>
+            <a:r>
+              <a:rPr lang="en-US" dirty="0"/>
+              <a:t>PRODUCT OVERVIEW</a:t>
+            </a:r>
+          </a:p>
+        </p:txBody>
+      </p:sp>
+      <p:pic>
+        <p:nvPicPr>
+          <p:cNvPr id="3" name="Picture 2">
+            <a:extLst>
+              <a:ext uri="{FF2B5EF4-FFF2-40B4-BE49-F238E27FC236}">
+                <a16:creationId xmlns:a16="http://schemas.microsoft.com/office/drawing/2014/main" id="{8DE00D5C-8E1B-3848-BBCA-909AF0A66EB3}"/>
+              </a:ext>
+            </a:extLst>
+          </p:cNvPr>
+          <p:cNvPicPr>
+            <a:picLocks noChangeAspect="1"/>
+          </p:cNvPicPr>
+          <p:nvPr/>
+        </p:nvPicPr>
+        <p:blipFill>
+          <a:blip r:embed="rId2"/>
+          <a:stretch>
+            <a:fillRect/>
+          </a:stretch>
+        </p:blipFill>
+        <p:spPr>
+          <a:xfrm>
+            <a:off x="5524500" y="943582"/>
+            <a:ext cx="6667500" cy="4114800"/>
+          </a:xfrm>
+          <a:prstGeom prst="rect">
+            <a:avLst/>
+          </a:prstGeom>
+        </p:spPr>
+      </p:pic>
+    </p:spTree>
+    <p:extLst>
+      <p:ext uri="{BB962C8B-B14F-4D97-AF65-F5344CB8AC3E}">
+        <p14:creationId xmlns:p14="http://schemas.microsoft.com/office/powerpoint/2010/main" val="627703921"/>
+      </p:ext>
+    </p:extLst>
+  </p:cSld>
+  <p:clrMapOvr>
+    <a:masterClrMapping/>
+  </p:clrMapOvr>
+</p:sld>
+</file>
+
+<file path=ppt/slides/slide11.xml><?xml version="1.0" encoding="utf-8"?>
+<p:sld xmlns:a="http://schemas.openxmlformats.org/drawingml/2006/main" xmlns:r="http://schemas.openxmlformats.org/officeDocument/2006/relationships" xmlns:p="http://schemas.openxmlformats.org/presentationml/2006/main">
+  <p:cSld>
+    <p:spTree>
+      <p:nvGrpSpPr>
+        <p:cNvPr id="1" name=""/>
+        <p:cNvGrpSpPr/>
+        <p:nvPr/>
+      </p:nvGrpSpPr>
+      <p:grpSpPr>
+        <a:xfrm>
+          <a:off x="0" y="0"/>
+          <a:ext cx="0" cy="0"/>
+          <a:chOff x="0" y="0"/>
+          <a:chExt cx="0" cy="0"/>
+        </a:xfrm>
+      </p:grpSpPr>
+      <p:sp>
+        <p:nvSpPr>
+          <p:cNvPr id="2" name="Title 1">
+            <a:extLst>
+              <a:ext uri="{FF2B5EF4-FFF2-40B4-BE49-F238E27FC236}">
+                <a16:creationId xmlns:a16="http://schemas.microsoft.com/office/drawing/2014/main" id="{8A4E0A63-A388-49B1-A04E-27CE9BD622EF}"/>
+              </a:ext>
+            </a:extLst>
+          </p:cNvPr>
+          <p:cNvSpPr>
+            <a:spLocks noGrp="1"/>
+          </p:cNvSpPr>
+          <p:nvPr>
+            <p:ph type="title"/>
+          </p:nvPr>
+        </p:nvSpPr>
+        <p:spPr>
+          <a:xfrm>
+            <a:off x="5920169" y="1152771"/>
+            <a:ext cx="5431971" cy="846301"/>
+          </a:xfrm>
+        </p:spPr>
+        <p:txBody>
+          <a:bodyPr/>
+          <a:lstStyle/>
+          <a:p>
+            <a:r>
+              <a:rPr lang="en-US" dirty="0"/>
+              <a:t>BUSINESS MODEL</a:t>
+            </a:r>
+          </a:p>
+        </p:txBody>
+      </p:sp>
+      <p:sp>
+        <p:nvSpPr>
+          <p:cNvPr id="6" name="Text Placeholder 5">
+            <a:extLst>
+              <a:ext uri="{FF2B5EF4-FFF2-40B4-BE49-F238E27FC236}">
+                <a16:creationId xmlns:a16="http://schemas.microsoft.com/office/drawing/2014/main" id="{7640DF9D-0C9E-4C5D-9635-6B4DE10CCEE5}"/>
+              </a:ext>
+            </a:extLst>
+          </p:cNvPr>
+          <p:cNvSpPr>
+            <a:spLocks noGrp="1"/>
+          </p:cNvSpPr>
+          <p:nvPr>
+            <p:ph type="body" sz="quarter" idx="13"/>
+          </p:nvPr>
+        </p:nvSpPr>
+        <p:spPr>
+          <a:xfrm>
+            <a:off x="5922254" y="2469515"/>
+            <a:ext cx="5433204" cy="365125"/>
+          </a:xfrm>
+        </p:spPr>
+        <p:txBody>
+          <a:bodyPr vert="horz" lIns="91440" tIns="45720" rIns="91440" bIns="45720" rtlCol="0" anchor="t">
+            <a:noAutofit/>
+          </a:bodyPr>
+          <a:lstStyle/>
+          <a:p>
+            <a:r>
+              <a:rPr lang="en-US" noProof="1"/>
+              <a:t>ABSTRACT</a:t>
+            </a:r>
+          </a:p>
+        </p:txBody>
+      </p:sp>
+      <p:sp>
+        <p:nvSpPr>
+          <p:cNvPr id="7" name="Text Placeholder 6">
+            <a:extLst>
+              <a:ext uri="{FF2B5EF4-FFF2-40B4-BE49-F238E27FC236}">
+                <a16:creationId xmlns:a16="http://schemas.microsoft.com/office/drawing/2014/main" id="{40297407-CE4E-4284-879D-AEC395713625}"/>
+              </a:ext>
+            </a:extLst>
+          </p:cNvPr>
+          <p:cNvSpPr>
+            <a:spLocks noGrp="1"/>
+          </p:cNvSpPr>
+          <p:nvPr>
+            <p:ph type="body" sz="quarter" idx="15"/>
+          </p:nvPr>
+        </p:nvSpPr>
+        <p:spPr>
+          <a:xfrm>
+            <a:off x="5921828" y="2798940"/>
+            <a:ext cx="5431971" cy="557950"/>
+          </a:xfrm>
+        </p:spPr>
+        <p:txBody>
+          <a:bodyPr>
+            <a:normAutofit/>
+          </a:bodyPr>
+          <a:lstStyle/>
+          <a:p>
+            <a:r>
+              <a:rPr lang="en-US" noProof="1"/>
+              <a:t>We based our research on market trends and social media</a:t>
+            </a:r>
+          </a:p>
+        </p:txBody>
+      </p:sp>
+      <p:sp>
+        <p:nvSpPr>
+          <p:cNvPr id="8" name="Text Placeholder 7">
+            <a:extLst>
+              <a:ext uri="{FF2B5EF4-FFF2-40B4-BE49-F238E27FC236}">
+                <a16:creationId xmlns:a16="http://schemas.microsoft.com/office/drawing/2014/main" id="{F5C3A7BE-F7FC-4942-A31A-491A8A806103}"/>
+              </a:ext>
+            </a:extLst>
+          </p:cNvPr>
+          <p:cNvSpPr>
+            <a:spLocks noGrp="1"/>
+          </p:cNvSpPr>
+          <p:nvPr>
+            <p:ph type="body" sz="quarter" idx="23"/>
+          </p:nvPr>
+        </p:nvSpPr>
+        <p:spPr>
+          <a:xfrm>
+            <a:off x="5922254" y="3569311"/>
+            <a:ext cx="5433204" cy="365125"/>
+          </a:xfrm>
+        </p:spPr>
+        <p:txBody>
+          <a:bodyPr vert="horz" lIns="91440" tIns="45720" rIns="91440" bIns="45720" rtlCol="0" anchor="t">
+            <a:noAutofit/>
+          </a:bodyPr>
+          <a:lstStyle/>
+          <a:p>
+            <a:r>
+              <a:rPr lang="en-US" noProof="1"/>
+              <a:t>DESIGN</a:t>
+            </a:r>
+          </a:p>
+        </p:txBody>
+      </p:sp>
+      <p:sp>
+        <p:nvSpPr>
+          <p:cNvPr id="9" name="Text Placeholder 8">
+            <a:extLst>
+              <a:ext uri="{FF2B5EF4-FFF2-40B4-BE49-F238E27FC236}">
+                <a16:creationId xmlns:a16="http://schemas.microsoft.com/office/drawing/2014/main" id="{95CCE699-03D1-4642-B46A-B14EF17DA183}"/>
+              </a:ext>
+            </a:extLst>
+          </p:cNvPr>
+          <p:cNvSpPr>
+            <a:spLocks noGrp="1"/>
+          </p:cNvSpPr>
+          <p:nvPr>
+            <p:ph type="body" sz="quarter" idx="24"/>
+          </p:nvPr>
+        </p:nvSpPr>
+        <p:spPr>
+          <a:xfrm>
+            <a:off x="5921828" y="3898736"/>
+            <a:ext cx="5431971" cy="557950"/>
+          </a:xfrm>
+        </p:spPr>
+        <p:txBody>
+          <a:bodyPr>
+            <a:normAutofit/>
+          </a:bodyPr>
+          <a:lstStyle/>
+          <a:p>
+            <a:r>
+              <a:rPr lang="en-US" noProof="1"/>
+              <a:t>We believe people need more products specifically dedicated to this niche market</a:t>
+            </a:r>
+          </a:p>
+        </p:txBody>
+      </p:sp>
+      <p:sp>
+        <p:nvSpPr>
+          <p:cNvPr id="10" name="Text Placeholder 9">
+            <a:extLst>
+              <a:ext uri="{FF2B5EF4-FFF2-40B4-BE49-F238E27FC236}">
+                <a16:creationId xmlns:a16="http://schemas.microsoft.com/office/drawing/2014/main" id="{BC1DF189-6F2F-4C21-88CC-C82D3D0D147B}"/>
+              </a:ext>
+            </a:extLst>
+          </p:cNvPr>
+          <p:cNvSpPr>
+            <a:spLocks noGrp="1"/>
+          </p:cNvSpPr>
+          <p:nvPr>
+            <p:ph type="body" sz="quarter" idx="25"/>
+          </p:nvPr>
+        </p:nvSpPr>
+        <p:spPr>
+          <a:xfrm>
+            <a:off x="5922254" y="4669107"/>
+            <a:ext cx="5433204" cy="365125"/>
+          </a:xfrm>
+        </p:spPr>
+        <p:txBody>
+          <a:bodyPr vert="horz" lIns="91440" tIns="45720" rIns="91440" bIns="45720" rtlCol="0" anchor="t">
+            <a:normAutofit lnSpcReduction="10000"/>
+          </a:bodyPr>
+          <a:lstStyle/>
+          <a:p>
+            <a:r>
+              <a:rPr lang="en-US" noProof="1"/>
+              <a:t>RESEARCH</a:t>
+            </a:r>
+          </a:p>
+        </p:txBody>
+      </p:sp>
+      <p:sp>
+        <p:nvSpPr>
+          <p:cNvPr id="5" name="Text Placeholder 4">
+            <a:extLst>
+              <a:ext uri="{FF2B5EF4-FFF2-40B4-BE49-F238E27FC236}">
+                <a16:creationId xmlns:a16="http://schemas.microsoft.com/office/drawing/2014/main" id="{06E82690-B145-4D4F-B2D1-0B2A8C50FD71}"/>
+              </a:ext>
+            </a:extLst>
+          </p:cNvPr>
+          <p:cNvSpPr>
+            <a:spLocks noGrp="1"/>
+          </p:cNvSpPr>
+          <p:nvPr>
+            <p:ph type="body" sz="quarter" idx="26"/>
+          </p:nvPr>
+        </p:nvSpPr>
+        <p:spPr>
+          <a:xfrm>
+            <a:off x="5921828" y="4998532"/>
+            <a:ext cx="5431971" cy="557950"/>
+          </a:xfrm>
+        </p:spPr>
+        <p:txBody>
+          <a:bodyPr>
+            <a:normAutofit/>
+          </a:bodyPr>
+          <a:lstStyle/>
+          <a:p>
+            <a:r>
+              <a:rPr lang="en-US" noProof="1"/>
+              <a:t>Minimalist and easy to use </a:t>
+            </a:r>
+          </a:p>
+        </p:txBody>
+      </p:sp>
+      <p:sp>
+        <p:nvSpPr>
+          <p:cNvPr id="32" name="Date Placeholder 31">
+            <a:extLst>
+              <a:ext uri="{FF2B5EF4-FFF2-40B4-BE49-F238E27FC236}">
+                <a16:creationId xmlns:a16="http://schemas.microsoft.com/office/drawing/2014/main" id="{D5DB19F8-B538-4965-BA90-ED372B99F5DC}"/>
+              </a:ext>
+            </a:extLst>
+          </p:cNvPr>
+          <p:cNvSpPr>
+            <a:spLocks noGrp="1"/>
+          </p:cNvSpPr>
+          <p:nvPr>
+            <p:ph type="dt" sz="half" idx="20"/>
+          </p:nvPr>
+        </p:nvSpPr>
+        <p:spPr>
+          <a:xfrm>
+            <a:off x="5919680" y="6356350"/>
+            <a:ext cx="947516" cy="365125"/>
+          </a:xfrm>
+        </p:spPr>
+        <p:txBody>
+          <a:bodyPr/>
+          <a:lstStyle/>
+          <a:p>
+            <a:r>
+              <a:rPr lang="en-US" dirty="0"/>
+              <a:t>20XX</a:t>
+            </a:r>
+          </a:p>
+        </p:txBody>
+      </p:sp>
+      <p:sp>
+        <p:nvSpPr>
+          <p:cNvPr id="3" name="Footer Placeholder 2">
+            <a:extLst>
+              <a:ext uri="{FF2B5EF4-FFF2-40B4-BE49-F238E27FC236}">
+                <a16:creationId xmlns:a16="http://schemas.microsoft.com/office/drawing/2014/main" id="{005C44B1-BA82-483C-BD91-F89067442F9E}"/>
+              </a:ext>
+            </a:extLst>
+          </p:cNvPr>
+          <p:cNvSpPr>
+            <a:spLocks noGrp="1"/>
+          </p:cNvSpPr>
+          <p:nvPr>
+            <p:ph type="ftr" sz="quarter" idx="21"/>
+          </p:nvPr>
+        </p:nvSpPr>
+        <p:spPr>
+          <a:xfrm>
+            <a:off x="7161955" y="6356350"/>
+            <a:ext cx="3243942" cy="365125"/>
+          </a:xfrm>
+        </p:spPr>
+        <p:txBody>
+          <a:bodyPr/>
+          <a:lstStyle/>
+          <a:p>
+            <a:r>
+              <a:rPr lang="en-US" dirty="0"/>
+              <a:t>Pitch Deck</a:t>
+            </a:r>
+          </a:p>
+        </p:txBody>
+      </p:sp>
+      <p:sp>
+        <p:nvSpPr>
+          <p:cNvPr id="4" name="Slide Number Placeholder 3">
+            <a:extLst>
+              <a:ext uri="{FF2B5EF4-FFF2-40B4-BE49-F238E27FC236}">
+                <a16:creationId xmlns:a16="http://schemas.microsoft.com/office/drawing/2014/main" id="{79ED4A67-3A46-4F54-A12A-EAE1B53E6457}"/>
+              </a:ext>
+            </a:extLst>
+          </p:cNvPr>
+          <p:cNvSpPr>
+            <a:spLocks noGrp="1"/>
+          </p:cNvSpPr>
+          <p:nvPr>
+            <p:ph type="sldNum" sz="quarter" idx="22"/>
+          </p:nvPr>
+        </p:nvSpPr>
+        <p:spPr>
+          <a:xfrm>
+            <a:off x="10700656" y="6356350"/>
+            <a:ext cx="653143" cy="365125"/>
+          </a:xfrm>
+        </p:spPr>
+        <p:txBody>
+          <a:bodyPr/>
+          <a:lstStyle/>
+          <a:p>
+            <a:fld id="{19B51A1E-902D-48AF-9020-955120F399B6}" type="slidenum">
+              <a:rPr lang="en-US" smtClean="0"/>
+              <a:pPr/>
+              <a:t>11</a:t>
+            </a:fld>
+            <a:endParaRPr lang="en-US" dirty="0"/>
+          </a:p>
+        </p:txBody>
+      </p:sp>
+    </p:spTree>
+    <p:extLst>
+      <p:ext uri="{BB962C8B-B14F-4D97-AF65-F5344CB8AC3E}">
+        <p14:creationId xmlns:p14="http://schemas.microsoft.com/office/powerpoint/2010/main" val="2069393026"/>
+      </p:ext>
+    </p:extLst>
+  </p:cSld>
+  <p:clrMapOvr>
+    <a:masterClrMapping/>
+  </p:clrMapOvr>
+</p:sld>
+</file>
+
+<file path=ppt/slides/slide12.xml><?xml version="1.0" encoding="utf-8"?>
+<p:sld xmlns:a="http://schemas.openxmlformats.org/drawingml/2006/main" xmlns:r="http://schemas.openxmlformats.org/officeDocument/2006/relationships" xmlns:p="http://schemas.openxmlformats.org/presentationml/2006/main">
+  <p:cSld>
+    <p:spTree>
+      <p:nvGrpSpPr>
+        <p:cNvPr id="1" name=""/>
+        <p:cNvGrpSpPr/>
+        <p:nvPr/>
+      </p:nvGrpSpPr>
+      <p:grpSpPr>
+        <a:xfrm>
+          <a:off x="0" y="0"/>
+          <a:ext cx="0" cy="0"/>
+          <a:chOff x="0" y="0"/>
+          <a:chExt cx="0" cy="0"/>
+        </a:xfrm>
+      </p:grpSpPr>
+      <p:sp>
+        <p:nvSpPr>
+          <p:cNvPr id="2" name="Title 1">
+            <a:extLst>
+              <a:ext uri="{FF2B5EF4-FFF2-40B4-BE49-F238E27FC236}">
+                <a16:creationId xmlns:a16="http://schemas.microsoft.com/office/drawing/2014/main" id="{5CE54ABB-4929-4810-950B-2DAEA0A5BAB4}"/>
+              </a:ext>
+            </a:extLst>
+          </p:cNvPr>
+          <p:cNvSpPr>
+            <a:spLocks noGrp="1"/>
+          </p:cNvSpPr>
+          <p:nvPr>
+            <p:ph type="title"/>
+          </p:nvPr>
+        </p:nvSpPr>
+        <p:spPr>
+          <a:xfrm>
+            <a:off x="1885156" y="892177"/>
+            <a:ext cx="8421688" cy="1325563"/>
+          </a:xfrm>
+        </p:spPr>
+        <p:txBody>
+          <a:bodyPr/>
+          <a:lstStyle/>
+          <a:p>
+            <a:r>
+              <a:rPr lang="en-US" dirty="0"/>
+              <a:t>MARKET OVERVIEW</a:t>
+            </a:r>
+          </a:p>
+        </p:txBody>
+      </p:sp>
+      <p:sp>
+        <p:nvSpPr>
+          <p:cNvPr id="4" name="Text Placeholder 3">
+            <a:extLst>
+              <a:ext uri="{FF2B5EF4-FFF2-40B4-BE49-F238E27FC236}">
+                <a16:creationId xmlns:a16="http://schemas.microsoft.com/office/drawing/2014/main" id="{A112B089-A8F9-45B1-BE6E-EAC10163F082}"/>
+              </a:ext>
+            </a:extLst>
+          </p:cNvPr>
+          <p:cNvSpPr>
+            <a:spLocks noGrp="1"/>
+          </p:cNvSpPr>
+          <p:nvPr>
+            <p:ph type="body" idx="1"/>
+          </p:nvPr>
+        </p:nvSpPr>
+        <p:spPr>
+          <a:xfrm>
+            <a:off x="1243104" y="2776936"/>
+            <a:ext cx="2882475" cy="823912"/>
+          </a:xfrm>
+        </p:spPr>
+        <p:txBody>
+          <a:bodyPr/>
+          <a:lstStyle/>
+          <a:p>
+            <a:r>
+              <a:rPr lang="en-US" dirty="0"/>
+              <a:t>$3 Billion</a:t>
+            </a:r>
+          </a:p>
+        </p:txBody>
+      </p:sp>
+      <p:sp>
+        <p:nvSpPr>
+          <p:cNvPr id="7" name="Content Placeholder 6">
+            <a:extLst>
+              <a:ext uri="{FF2B5EF4-FFF2-40B4-BE49-F238E27FC236}">
+                <a16:creationId xmlns:a16="http://schemas.microsoft.com/office/drawing/2014/main" id="{6B35F89A-6CDF-41F7-BD87-18B45BD7330B}"/>
+              </a:ext>
+            </a:extLst>
+          </p:cNvPr>
+          <p:cNvSpPr>
+            <a:spLocks noGrp="1"/>
+          </p:cNvSpPr>
+          <p:nvPr>
+            <p:ph sz="half" idx="2"/>
+          </p:nvPr>
+        </p:nvSpPr>
+        <p:spPr>
+          <a:xfrm>
+            <a:off x="1243104" y="3834606"/>
+            <a:ext cx="2882475" cy="1997867"/>
+          </a:xfrm>
+        </p:spPr>
+        <p:txBody>
+          <a:bodyPr vert="horz" lIns="91440" tIns="45720" rIns="91440" bIns="45720" rtlCol="0" anchor="t">
+            <a:normAutofit/>
+          </a:bodyPr>
+          <a:lstStyle/>
+          <a:p>
+            <a:r>
+              <a:rPr lang="en-US" noProof="1"/>
+              <a:t>Freedom to invent</a:t>
+            </a:r>
+            <a:endParaRPr lang="en-US" dirty="0"/>
+          </a:p>
+          <a:p>
+            <a:r>
+              <a:rPr lang="en-US" noProof="1"/>
+              <a:t>Selectively inclusive market</a:t>
+            </a:r>
+          </a:p>
+          <a:p>
+            <a:r>
+              <a:rPr lang="en-US" noProof="1"/>
+              <a:t>Serviceable available market</a:t>
+            </a:r>
+          </a:p>
+          <a:p>
+            <a:endParaRPr lang="en-US" noProof="1"/>
+          </a:p>
+        </p:txBody>
+      </p:sp>
+      <p:sp>
+        <p:nvSpPr>
+          <p:cNvPr id="6" name="Text Placeholder 5">
+            <a:extLst>
+              <a:ext uri="{FF2B5EF4-FFF2-40B4-BE49-F238E27FC236}">
+                <a16:creationId xmlns:a16="http://schemas.microsoft.com/office/drawing/2014/main" id="{0FE22F9B-4BF8-41DC-8F1C-836B546E59AD}"/>
+              </a:ext>
+            </a:extLst>
+          </p:cNvPr>
+          <p:cNvSpPr>
+            <a:spLocks noGrp="1"/>
+          </p:cNvSpPr>
+          <p:nvPr>
+            <p:ph type="body" sz="quarter" idx="3"/>
+          </p:nvPr>
+        </p:nvSpPr>
+        <p:spPr>
+          <a:xfrm>
+            <a:off x="4647665" y="2776936"/>
+            <a:ext cx="2896671" cy="823912"/>
+          </a:xfrm>
+        </p:spPr>
+        <p:txBody>
+          <a:bodyPr/>
+          <a:lstStyle/>
+          <a:p>
+            <a:r>
+              <a:rPr lang="en-US" dirty="0"/>
+              <a:t>$1 Billion</a:t>
+            </a:r>
+          </a:p>
+        </p:txBody>
+      </p:sp>
+      <p:sp>
+        <p:nvSpPr>
+          <p:cNvPr id="3" name="Text Placeholder 2">
+            <a:extLst>
+              <a:ext uri="{FF2B5EF4-FFF2-40B4-BE49-F238E27FC236}">
+                <a16:creationId xmlns:a16="http://schemas.microsoft.com/office/drawing/2014/main" id="{D5E1C399-8F48-44F5-9461-3C89866D4CE1}"/>
+              </a:ext>
+            </a:extLst>
+          </p:cNvPr>
+          <p:cNvSpPr>
+            <a:spLocks noGrp="1"/>
+          </p:cNvSpPr>
+          <p:nvPr>
+            <p:ph sz="quarter" idx="4"/>
+          </p:nvPr>
+        </p:nvSpPr>
+        <p:spPr>
+          <a:xfrm>
+            <a:off x="4647665" y="3834606"/>
+            <a:ext cx="2896671" cy="1997867"/>
+          </a:xfrm>
+        </p:spPr>
+        <p:txBody>
+          <a:bodyPr/>
+          <a:lstStyle/>
+          <a:p>
+            <a:r>
+              <a:rPr lang="en-US" dirty="0"/>
+              <a:t>Opportunity to build</a:t>
+            </a:r>
+          </a:p>
+          <a:p>
+            <a:r>
+              <a:rPr lang="en-US" dirty="0"/>
+              <a:t>Fully inclusive market</a:t>
+            </a:r>
+          </a:p>
+          <a:p>
+            <a:r>
+              <a:rPr lang="en-US" dirty="0"/>
+              <a:t>Total addressable market</a:t>
+            </a:r>
+          </a:p>
+        </p:txBody>
+      </p:sp>
+      <p:sp>
+        <p:nvSpPr>
+          <p:cNvPr id="5" name="Content Placeholder 4">
+            <a:extLst>
+              <a:ext uri="{FF2B5EF4-FFF2-40B4-BE49-F238E27FC236}">
+                <a16:creationId xmlns:a16="http://schemas.microsoft.com/office/drawing/2014/main" id="{CF515C5D-2CDB-4E66-B2B8-1451BC44247F}"/>
+              </a:ext>
+            </a:extLst>
+          </p:cNvPr>
+          <p:cNvSpPr>
+            <a:spLocks noGrp="1"/>
+          </p:cNvSpPr>
+          <p:nvPr>
+            <p:ph type="body" idx="13"/>
+          </p:nvPr>
+        </p:nvSpPr>
+        <p:spPr>
+          <a:xfrm>
+            <a:off x="8066421" y="2776936"/>
+            <a:ext cx="2882475" cy="823912"/>
+          </a:xfrm>
+        </p:spPr>
+        <p:txBody>
+          <a:bodyPr vert="horz" lIns="91440" tIns="45720" rIns="91440" bIns="45720" rtlCol="0" anchor="b">
+            <a:normAutofit/>
+          </a:bodyPr>
+          <a:lstStyle/>
+          <a:p>
+            <a:r>
+              <a:rPr lang="en-US" dirty="0"/>
+              <a:t>$2 Billion</a:t>
+            </a:r>
+          </a:p>
+        </p:txBody>
+      </p:sp>
+      <p:sp>
+        <p:nvSpPr>
+          <p:cNvPr id="8" name="Text Placeholder 7">
+            <a:extLst>
+              <a:ext uri="{FF2B5EF4-FFF2-40B4-BE49-F238E27FC236}">
+                <a16:creationId xmlns:a16="http://schemas.microsoft.com/office/drawing/2014/main" id="{E92B9716-8D44-4864-8986-720957B34362}"/>
+              </a:ext>
+            </a:extLst>
+          </p:cNvPr>
+          <p:cNvSpPr>
+            <a:spLocks noGrp="1"/>
+          </p:cNvSpPr>
+          <p:nvPr>
+            <p:ph sz="half" idx="14"/>
+          </p:nvPr>
+        </p:nvSpPr>
+        <p:spPr>
+          <a:xfrm>
+            <a:off x="8066421" y="3834606"/>
+            <a:ext cx="2882475" cy="1997867"/>
+          </a:xfrm>
+        </p:spPr>
+        <p:txBody>
+          <a:bodyPr/>
+          <a:lstStyle/>
+          <a:p>
+            <a:r>
+              <a:rPr lang="en-US" noProof="1"/>
+              <a:t>Few competitors</a:t>
+            </a:r>
+          </a:p>
+          <a:p>
+            <a:r>
+              <a:rPr lang="en-US" noProof="1"/>
+              <a:t>Specifically targeted market</a:t>
+            </a:r>
+          </a:p>
+          <a:p>
+            <a:r>
+              <a:rPr lang="en-US" noProof="1"/>
+              <a:t>Serviceable obtainable market</a:t>
+            </a:r>
+            <a:endParaRPr lang="en-US" dirty="0"/>
+          </a:p>
+          <a:p>
+            <a:endParaRPr lang="en-US" dirty="0"/>
+          </a:p>
+        </p:txBody>
+      </p:sp>
+      <p:sp>
+        <p:nvSpPr>
+          <p:cNvPr id="9" name="Date Placeholder 8">
+            <a:extLst>
+              <a:ext uri="{FF2B5EF4-FFF2-40B4-BE49-F238E27FC236}">
+                <a16:creationId xmlns:a16="http://schemas.microsoft.com/office/drawing/2014/main" id="{7B78F7A0-88C5-4940-B21C-099F472F39F9}"/>
+              </a:ext>
+            </a:extLst>
+          </p:cNvPr>
+          <p:cNvSpPr>
+            <a:spLocks noGrp="1"/>
+          </p:cNvSpPr>
+          <p:nvPr>
+            <p:ph type="dt" sz="half" idx="10"/>
+          </p:nvPr>
+        </p:nvSpPr>
+        <p:spPr>
+          <a:xfrm>
+            <a:off x="838200" y="6356350"/>
+            <a:ext cx="2743200" cy="365125"/>
+          </a:xfrm>
+        </p:spPr>
+        <p:txBody>
+          <a:bodyPr/>
+          <a:lstStyle/>
+          <a:p>
+            <a:r>
+              <a:rPr lang="en-US" dirty="0"/>
+              <a:t>20XX</a:t>
+            </a:r>
+          </a:p>
+        </p:txBody>
+      </p:sp>
+      <p:sp>
+        <p:nvSpPr>
+          <p:cNvPr id="10" name="Footer Placeholder 9">
+            <a:extLst>
+              <a:ext uri="{FF2B5EF4-FFF2-40B4-BE49-F238E27FC236}">
+                <a16:creationId xmlns:a16="http://schemas.microsoft.com/office/drawing/2014/main" id="{D2186069-FC8E-433D-9BB4-942220CE8CFB}"/>
+              </a:ext>
+            </a:extLst>
+          </p:cNvPr>
+          <p:cNvSpPr>
+            <a:spLocks noGrp="1"/>
+          </p:cNvSpPr>
+          <p:nvPr>
+            <p:ph type="ftr" sz="quarter" idx="11"/>
+          </p:nvPr>
+        </p:nvSpPr>
+        <p:spPr>
+          <a:xfrm>
+            <a:off x="4038600" y="6356350"/>
+            <a:ext cx="4114800" cy="365125"/>
+          </a:xfrm>
+        </p:spPr>
+        <p:txBody>
+          <a:bodyPr/>
+          <a:lstStyle/>
+          <a:p>
+            <a:r>
+              <a:rPr lang="en-US" dirty="0"/>
+              <a:t>Pitch Deck</a:t>
+            </a:r>
+          </a:p>
+        </p:txBody>
+      </p:sp>
+      <p:sp>
+        <p:nvSpPr>
+          <p:cNvPr id="11" name="Slide Number Placeholder 10">
+            <a:extLst>
+              <a:ext uri="{FF2B5EF4-FFF2-40B4-BE49-F238E27FC236}">
+                <a16:creationId xmlns:a16="http://schemas.microsoft.com/office/drawing/2014/main" id="{BAD5B6F4-0A90-447A-A1AE-D75C934B6B29}"/>
+              </a:ext>
+            </a:extLst>
+          </p:cNvPr>
+          <p:cNvSpPr>
+            <a:spLocks noGrp="1"/>
+          </p:cNvSpPr>
+          <p:nvPr>
+            <p:ph type="sldNum" sz="quarter" idx="12"/>
+          </p:nvPr>
+        </p:nvSpPr>
+        <p:spPr>
+          <a:xfrm>
+            <a:off x="8610600" y="6356350"/>
+            <a:ext cx="2743200" cy="365125"/>
+          </a:xfrm>
+        </p:spPr>
+        <p:txBody>
+          <a:bodyPr/>
+          <a:lstStyle/>
+          <a:p>
+            <a:fld id="{B5CEABB6-07DC-46E8-9B57-56EC44A396E5}" type="slidenum">
+              <a:rPr lang="en-US" smtClean="0"/>
+              <a:pPr/>
+              <a:t>12</a:t>
+            </a:fld>
+            <a:endParaRPr lang="en-US" dirty="0"/>
+          </a:p>
+        </p:txBody>
+      </p:sp>
+    </p:spTree>
+    <p:extLst>
+      <p:ext uri="{BB962C8B-B14F-4D97-AF65-F5344CB8AC3E}">
+        <p14:creationId xmlns:p14="http://schemas.microsoft.com/office/powerpoint/2010/main" val="2121178069"/>
+      </p:ext>
+    </p:extLst>
+  </p:cSld>
+  <p:clrMapOvr>
+    <a:masterClrMapping/>
+  </p:clrMapOvr>
+</p:sld>
+</file>
+
+<file path=ppt/slides/slide13.xml><?xml version="1.0" encoding="utf-8"?>
 <p:sld xmlns:a="http://schemas.openxmlformats.org/drawingml/2006/main" xmlns:r="http://schemas.openxmlformats.org/officeDocument/2006/relationships" xmlns:p="http://schemas.openxmlformats.org/presentationml/2006/main">
   <p:cSld>
     <p:spTree>
@@ -16211,7 +17218,7 @@
             <a:fld id="{B5CEABB6-07DC-46E8-9B57-56EC44A396E5}" type="slidenum">
               <a:rPr lang="en-US" smtClean="0"/>
               <a:pPr/>
-              <a:t>10</a:t>
+              <a:t>13</a:t>
             </a:fld>
             <a:endParaRPr lang="en-US" dirty="0"/>
           </a:p>
@@ -16260,7 +17267,7 @@
 </p:sld>
 </file>
 
-<file path=ppt/slides/slide11.xml><?xml version="1.0" encoding="utf-8"?>
+<file path=ppt/slides/slide14.xml><?xml version="1.0" encoding="utf-8"?>
 <p:sld xmlns:a="http://schemas.openxmlformats.org/drawingml/2006/main" xmlns:r="http://schemas.openxmlformats.org/officeDocument/2006/relationships" xmlns:p="http://schemas.openxmlformats.org/presentationml/2006/main">
   <p:cSld>
     <p:spTree>
@@ -16411,7 +17418,7 @@
             <a:fld id="{B5CEABB6-07DC-46E8-9B57-56EC44A396E5}" type="slidenum">
               <a:rPr lang="en-US" smtClean="0"/>
               <a:pPr/>
-              <a:t>11</a:t>
+              <a:t>14</a:t>
             </a:fld>
             <a:endParaRPr lang="en-US" dirty="0"/>
           </a:p>
@@ -16460,7 +17467,7 @@
 </p:sld>
 </file>
 
-<file path=ppt/slides/slide12.xml><?xml version="1.0" encoding="utf-8"?>
+<file path=ppt/slides/slide15.xml><?xml version="1.0" encoding="utf-8"?>
 <p:sld xmlns:a="http://schemas.openxmlformats.org/drawingml/2006/main" xmlns:r="http://schemas.openxmlformats.org/officeDocument/2006/relationships" xmlns:p="http://schemas.openxmlformats.org/presentationml/2006/main">
   <p:cSld>
     <p:spTree>
@@ -16611,7 +17618,7 @@
             <a:fld id="{B5CEABB6-07DC-46E8-9B57-56EC44A396E5}" type="slidenum">
               <a:rPr lang="en-US" smtClean="0"/>
               <a:pPr/>
-              <a:t>12</a:t>
+              <a:t>15</a:t>
             </a:fld>
             <a:endParaRPr lang="en-US" dirty="0"/>
           </a:p>
@@ -16660,7 +17667,7 @@
 </p:sld>
 </file>
 
-<file path=ppt/slides/slide13.xml><?xml version="1.0" encoding="utf-8"?>
+<file path=ppt/slides/slide16.xml><?xml version="1.0" encoding="utf-8"?>
 <p:sld xmlns:a="http://schemas.openxmlformats.org/drawingml/2006/main" xmlns:r="http://schemas.openxmlformats.org/officeDocument/2006/relationships" xmlns:p="http://schemas.openxmlformats.org/presentationml/2006/main">
   <p:cSld>
     <p:spTree>
@@ -16811,7 +17818,7 @@
             <a:fld id="{B5CEABB6-07DC-46E8-9B57-56EC44A396E5}" type="slidenum">
               <a:rPr lang="en-US" smtClean="0"/>
               <a:pPr/>
-              <a:t>13</a:t>
+              <a:t>16</a:t>
             </a:fld>
             <a:endParaRPr lang="en-US" dirty="0"/>
           </a:p>
@@ -16860,7 +17867,7 @@
 </p:sld>
 </file>
 
-<file path=ppt/slides/slide14.xml><?xml version="1.0" encoding="utf-8"?>
+<file path=ppt/slides/slide17.xml><?xml version="1.0" encoding="utf-8"?>
 <p:sld xmlns:a="http://schemas.openxmlformats.org/drawingml/2006/main" xmlns:r="http://schemas.openxmlformats.org/officeDocument/2006/relationships" xmlns:p="http://schemas.openxmlformats.org/presentationml/2006/main">
   <p:cSld>
     <p:spTree>
@@ -17011,7 +18018,7 @@
             <a:fld id="{B5CEABB6-07DC-46E8-9B57-56EC44A396E5}" type="slidenum">
               <a:rPr lang="en-US" smtClean="0"/>
               <a:pPr/>
-              <a:t>14</a:t>
+              <a:t>17</a:t>
             </a:fld>
             <a:endParaRPr lang="en-US" dirty="0"/>
           </a:p>
@@ -17060,7 +18067,7 @@
 </p:sld>
 </file>
 
-<file path=ppt/slides/slide15.xml><?xml version="1.0" encoding="utf-8"?>
+<file path=ppt/slides/slide18.xml><?xml version="1.0" encoding="utf-8"?>
 <p:sld xmlns:a="http://schemas.openxmlformats.org/drawingml/2006/main" xmlns:r="http://schemas.openxmlformats.org/officeDocument/2006/relationships" xmlns:p="http://schemas.openxmlformats.org/presentationml/2006/main">
   <p:cSld>
     <p:spTree>
@@ -17211,7 +18218,7 @@
             <a:fld id="{B5CEABB6-07DC-46E8-9B57-56EC44A396E5}" type="slidenum">
               <a:rPr lang="en-US" smtClean="0"/>
               <a:pPr/>
-              <a:t>15</a:t>
+              <a:t>18</a:t>
             </a:fld>
             <a:endParaRPr lang="en-US" dirty="0"/>
           </a:p>
@@ -17260,7 +18267,7 @@
 </p:sld>
 </file>
 
-<file path=ppt/slides/slide16.xml><?xml version="1.0" encoding="utf-8"?>
+<file path=ppt/slides/slide19.xml><?xml version="1.0" encoding="utf-8"?>
 <p:sld xmlns:a="http://schemas.openxmlformats.org/drawingml/2006/main" xmlns:r="http://schemas.openxmlformats.org/officeDocument/2006/relationships" xmlns:p="http://schemas.openxmlformats.org/presentationml/2006/main">
   <p:cSld>
     <p:spTree>
@@ -17411,7 +18418,7 @@
             <a:fld id="{B5CEABB6-07DC-46E8-9B57-56EC44A396E5}" type="slidenum">
               <a:rPr lang="en-US" smtClean="0"/>
               <a:pPr/>
-              <a:t>16</a:t>
+              <a:t>19</a:t>
             </a:fld>
             <a:endParaRPr lang="en-US" dirty="0"/>
           </a:p>
@@ -17451,406 +18458,6 @@
     <p:extLst>
       <p:ext uri="{BB962C8B-B14F-4D97-AF65-F5344CB8AC3E}">
         <p14:creationId xmlns:p14="http://schemas.microsoft.com/office/powerpoint/2010/main" val="2103076649"/>
-      </p:ext>
-    </p:extLst>
-  </p:cSld>
-  <p:clrMapOvr>
-    <a:masterClrMapping/>
-  </p:clrMapOvr>
-</p:sld>
-</file>
-
-<file path=ppt/slides/slide17.xml><?xml version="1.0" encoding="utf-8"?>
-<p:sld xmlns:a="http://schemas.openxmlformats.org/drawingml/2006/main" xmlns:r="http://schemas.openxmlformats.org/officeDocument/2006/relationships" xmlns:p="http://schemas.openxmlformats.org/presentationml/2006/main">
-  <p:cSld>
-    <p:spTree>
-      <p:nvGrpSpPr>
-        <p:cNvPr id="1" name="">
-          <a:extLst>
-            <a:ext uri="{FF2B5EF4-FFF2-40B4-BE49-F238E27FC236}">
-              <a16:creationId xmlns:a16="http://schemas.microsoft.com/office/drawing/2014/main" id="{7A5B5218-5146-79A0-681F-78576DB8FE38}"/>
-            </a:ext>
-          </a:extLst>
-        </p:cNvPr>
-        <p:cNvGrpSpPr/>
-        <p:nvPr/>
-      </p:nvGrpSpPr>
-      <p:grpSpPr>
-        <a:xfrm>
-          <a:off x="0" y="0"/>
-          <a:ext cx="0" cy="0"/>
-          <a:chOff x="0" y="0"/>
-          <a:chExt cx="0" cy="0"/>
-        </a:xfrm>
-      </p:grpSpPr>
-      <p:sp>
-        <p:nvSpPr>
-          <p:cNvPr id="2" name="Title 1">
-            <a:extLst>
-              <a:ext uri="{FF2B5EF4-FFF2-40B4-BE49-F238E27FC236}">
-                <a16:creationId xmlns:a16="http://schemas.microsoft.com/office/drawing/2014/main" id="{7B9D52CA-6952-1A0A-BBB0-1DAC522F54EC}"/>
-              </a:ext>
-            </a:extLst>
-          </p:cNvPr>
-          <p:cNvSpPr>
-            <a:spLocks noGrp="1"/>
-          </p:cNvSpPr>
-          <p:nvPr>
-            <p:ph type="title"/>
-          </p:nvPr>
-        </p:nvSpPr>
-        <p:spPr>
-          <a:xfrm>
-            <a:off x="1560512" y="229395"/>
-            <a:ext cx="8421688" cy="1325563"/>
-          </a:xfrm>
-        </p:spPr>
-        <p:txBody>
-          <a:bodyPr/>
-          <a:lstStyle/>
-          <a:p>
-            <a:r>
-              <a:rPr lang="en-US" dirty="0"/>
-              <a:t>MARKET OVERVIEW</a:t>
-            </a:r>
-          </a:p>
-        </p:txBody>
-      </p:sp>
-      <p:sp>
-        <p:nvSpPr>
-          <p:cNvPr id="9" name="Date Placeholder 8">
-            <a:extLst>
-              <a:ext uri="{FF2B5EF4-FFF2-40B4-BE49-F238E27FC236}">
-                <a16:creationId xmlns:a16="http://schemas.microsoft.com/office/drawing/2014/main" id="{B4FA31FD-8498-DB1F-1E78-A65D48ADE1C8}"/>
-              </a:ext>
-            </a:extLst>
-          </p:cNvPr>
-          <p:cNvSpPr>
-            <a:spLocks noGrp="1"/>
-          </p:cNvSpPr>
-          <p:nvPr>
-            <p:ph type="dt" sz="half" idx="10"/>
-          </p:nvPr>
-        </p:nvSpPr>
-        <p:spPr>
-          <a:xfrm>
-            <a:off x="838200" y="6356350"/>
-            <a:ext cx="2743200" cy="365125"/>
-          </a:xfrm>
-        </p:spPr>
-        <p:txBody>
-          <a:bodyPr/>
-          <a:lstStyle/>
-          <a:p>
-            <a:r>
-              <a:rPr lang="en-US" dirty="0"/>
-              <a:t>20XX</a:t>
-            </a:r>
-          </a:p>
-        </p:txBody>
-      </p:sp>
-      <p:sp>
-        <p:nvSpPr>
-          <p:cNvPr id="10" name="Footer Placeholder 9">
-            <a:extLst>
-              <a:ext uri="{FF2B5EF4-FFF2-40B4-BE49-F238E27FC236}">
-                <a16:creationId xmlns:a16="http://schemas.microsoft.com/office/drawing/2014/main" id="{4044E3A9-D818-9454-F7F2-E6BF13813091}"/>
-              </a:ext>
-            </a:extLst>
-          </p:cNvPr>
-          <p:cNvSpPr>
-            <a:spLocks noGrp="1"/>
-          </p:cNvSpPr>
-          <p:nvPr>
-            <p:ph type="ftr" sz="quarter" idx="11"/>
-          </p:nvPr>
-        </p:nvSpPr>
-        <p:spPr>
-          <a:xfrm>
-            <a:off x="4038600" y="6356350"/>
-            <a:ext cx="4114800" cy="365125"/>
-          </a:xfrm>
-        </p:spPr>
-        <p:txBody>
-          <a:bodyPr/>
-          <a:lstStyle/>
-          <a:p>
-            <a:r>
-              <a:rPr lang="en-US" dirty="0"/>
-              <a:t>Pitch Deck</a:t>
-            </a:r>
-          </a:p>
-        </p:txBody>
-      </p:sp>
-      <p:sp>
-        <p:nvSpPr>
-          <p:cNvPr id="11" name="Slide Number Placeholder 10">
-            <a:extLst>
-              <a:ext uri="{FF2B5EF4-FFF2-40B4-BE49-F238E27FC236}">
-                <a16:creationId xmlns:a16="http://schemas.microsoft.com/office/drawing/2014/main" id="{0F8F46C2-36F7-2B51-C1D8-EB50E70B3D6D}"/>
-              </a:ext>
-            </a:extLst>
-          </p:cNvPr>
-          <p:cNvSpPr>
-            <a:spLocks noGrp="1"/>
-          </p:cNvSpPr>
-          <p:nvPr>
-            <p:ph type="sldNum" sz="quarter" idx="12"/>
-          </p:nvPr>
-        </p:nvSpPr>
-        <p:spPr>
-          <a:xfrm>
-            <a:off x="8610600" y="6356350"/>
-            <a:ext cx="2743200" cy="365125"/>
-          </a:xfrm>
-        </p:spPr>
-        <p:txBody>
-          <a:bodyPr/>
-          <a:lstStyle/>
-          <a:p>
-            <a:fld id="{B5CEABB6-07DC-46E8-9B57-56EC44A396E5}" type="slidenum">
-              <a:rPr lang="en-US" smtClean="0"/>
-              <a:pPr/>
-              <a:t>17</a:t>
-            </a:fld>
-            <a:endParaRPr lang="en-US" dirty="0"/>
-          </a:p>
-        </p:txBody>
-      </p:sp>
-      <p:pic>
-        <p:nvPicPr>
-          <p:cNvPr id="3" name="Picture 2">
-            <a:extLst>
-              <a:ext uri="{FF2B5EF4-FFF2-40B4-BE49-F238E27FC236}">
-                <a16:creationId xmlns:a16="http://schemas.microsoft.com/office/drawing/2014/main" id="{A100AEA6-2192-F118-CDAE-6BB71193E12E}"/>
-              </a:ext>
-            </a:extLst>
-          </p:cNvPr>
-          <p:cNvPicPr>
-            <a:picLocks noChangeAspect="1"/>
-          </p:cNvPicPr>
-          <p:nvPr/>
-        </p:nvPicPr>
-        <p:blipFill>
-          <a:blip r:embed="rId2"/>
-          <a:stretch>
-            <a:fillRect/>
-          </a:stretch>
-        </p:blipFill>
-        <p:spPr>
-          <a:xfrm>
-            <a:off x="4819650" y="1554958"/>
-            <a:ext cx="6667500" cy="4114800"/>
-          </a:xfrm>
-          <a:prstGeom prst="rect">
-            <a:avLst/>
-          </a:prstGeom>
-        </p:spPr>
-      </p:pic>
-    </p:spTree>
-    <p:extLst>
-      <p:ext uri="{BB962C8B-B14F-4D97-AF65-F5344CB8AC3E}">
-        <p14:creationId xmlns:p14="http://schemas.microsoft.com/office/powerpoint/2010/main" val="304014284"/>
-      </p:ext>
-    </p:extLst>
-  </p:cSld>
-  <p:clrMapOvr>
-    <a:masterClrMapping/>
-  </p:clrMapOvr>
-</p:sld>
-</file>
-
-<file path=ppt/slides/slide18.xml><?xml version="1.0" encoding="utf-8"?>
-<p:sld xmlns:a="http://schemas.openxmlformats.org/drawingml/2006/main" xmlns:r="http://schemas.openxmlformats.org/officeDocument/2006/relationships" xmlns:p="http://schemas.openxmlformats.org/presentationml/2006/main">
-  <p:cSld>
-    <p:spTree>
-      <p:nvGrpSpPr>
-        <p:cNvPr id="1" name="">
-          <a:extLst>
-            <a:ext uri="{FF2B5EF4-FFF2-40B4-BE49-F238E27FC236}">
-              <a16:creationId xmlns:a16="http://schemas.microsoft.com/office/drawing/2014/main" id="{5F34708D-24CA-4D67-66DC-BEE28E256701}"/>
-            </a:ext>
-          </a:extLst>
-        </p:cNvPr>
-        <p:cNvGrpSpPr/>
-        <p:nvPr/>
-      </p:nvGrpSpPr>
-      <p:grpSpPr>
-        <a:xfrm>
-          <a:off x="0" y="0"/>
-          <a:ext cx="0" cy="0"/>
-          <a:chOff x="0" y="0"/>
-          <a:chExt cx="0" cy="0"/>
-        </a:xfrm>
-      </p:grpSpPr>
-      <p:sp>
-        <p:nvSpPr>
-          <p:cNvPr id="2" name="Title 1">
-            <a:extLst>
-              <a:ext uri="{FF2B5EF4-FFF2-40B4-BE49-F238E27FC236}">
-                <a16:creationId xmlns:a16="http://schemas.microsoft.com/office/drawing/2014/main" id="{30277119-A7E3-AFBA-65C5-92596AC8AA78}"/>
-              </a:ext>
-            </a:extLst>
-          </p:cNvPr>
-          <p:cNvSpPr>
-            <a:spLocks noGrp="1"/>
-          </p:cNvSpPr>
-          <p:nvPr>
-            <p:ph type="title"/>
-          </p:nvPr>
-        </p:nvSpPr>
-        <p:spPr>
-          <a:xfrm>
-            <a:off x="1560512" y="229395"/>
-            <a:ext cx="8421688" cy="1325563"/>
-          </a:xfrm>
-        </p:spPr>
-        <p:txBody>
-          <a:bodyPr/>
-          <a:lstStyle/>
-          <a:p>
-            <a:r>
-              <a:rPr lang="en-US" dirty="0"/>
-              <a:t>MARKET OVERVIEW</a:t>
-            </a:r>
-          </a:p>
-        </p:txBody>
-      </p:sp>
-      <p:sp>
-        <p:nvSpPr>
-          <p:cNvPr id="9" name="Date Placeholder 8">
-            <a:extLst>
-              <a:ext uri="{FF2B5EF4-FFF2-40B4-BE49-F238E27FC236}">
-                <a16:creationId xmlns:a16="http://schemas.microsoft.com/office/drawing/2014/main" id="{05EF780F-E8A7-F88D-FF69-C4CF95B077B0}"/>
-              </a:ext>
-            </a:extLst>
-          </p:cNvPr>
-          <p:cNvSpPr>
-            <a:spLocks noGrp="1"/>
-          </p:cNvSpPr>
-          <p:nvPr>
-            <p:ph type="dt" sz="half" idx="10"/>
-          </p:nvPr>
-        </p:nvSpPr>
-        <p:spPr>
-          <a:xfrm>
-            <a:off x="838200" y="6356350"/>
-            <a:ext cx="2743200" cy="365125"/>
-          </a:xfrm>
-        </p:spPr>
-        <p:txBody>
-          <a:bodyPr/>
-          <a:lstStyle/>
-          <a:p>
-            <a:r>
-              <a:rPr lang="en-US" dirty="0"/>
-              <a:t>20XX</a:t>
-            </a:r>
-          </a:p>
-        </p:txBody>
-      </p:sp>
-      <p:sp>
-        <p:nvSpPr>
-          <p:cNvPr id="10" name="Footer Placeholder 9">
-            <a:extLst>
-              <a:ext uri="{FF2B5EF4-FFF2-40B4-BE49-F238E27FC236}">
-                <a16:creationId xmlns:a16="http://schemas.microsoft.com/office/drawing/2014/main" id="{A2939AFD-EB64-6BF9-02CA-9AB7723492B0}"/>
-              </a:ext>
-            </a:extLst>
-          </p:cNvPr>
-          <p:cNvSpPr>
-            <a:spLocks noGrp="1"/>
-          </p:cNvSpPr>
-          <p:nvPr>
-            <p:ph type="ftr" sz="quarter" idx="11"/>
-          </p:nvPr>
-        </p:nvSpPr>
-        <p:spPr>
-          <a:xfrm>
-            <a:off x="4038600" y="6356350"/>
-            <a:ext cx="4114800" cy="365125"/>
-          </a:xfrm>
-        </p:spPr>
-        <p:txBody>
-          <a:bodyPr/>
-          <a:lstStyle/>
-          <a:p>
-            <a:r>
-              <a:rPr lang="en-US" dirty="0"/>
-              <a:t>Pitch Deck</a:t>
-            </a:r>
-          </a:p>
-        </p:txBody>
-      </p:sp>
-      <p:sp>
-        <p:nvSpPr>
-          <p:cNvPr id="11" name="Slide Number Placeholder 10">
-            <a:extLst>
-              <a:ext uri="{FF2B5EF4-FFF2-40B4-BE49-F238E27FC236}">
-                <a16:creationId xmlns:a16="http://schemas.microsoft.com/office/drawing/2014/main" id="{0FF8FAA6-EC22-4989-7A0E-50E6B3D1BCD1}"/>
-              </a:ext>
-            </a:extLst>
-          </p:cNvPr>
-          <p:cNvSpPr>
-            <a:spLocks noGrp="1"/>
-          </p:cNvSpPr>
-          <p:nvPr>
-            <p:ph type="sldNum" sz="quarter" idx="12"/>
-          </p:nvPr>
-        </p:nvSpPr>
-        <p:spPr>
-          <a:xfrm>
-            <a:off x="8610600" y="6356350"/>
-            <a:ext cx="2743200" cy="365125"/>
-          </a:xfrm>
-        </p:spPr>
-        <p:txBody>
-          <a:bodyPr/>
-          <a:lstStyle/>
-          <a:p>
-            <a:fld id="{B5CEABB6-07DC-46E8-9B57-56EC44A396E5}" type="slidenum">
-              <a:rPr lang="en-US" smtClean="0"/>
-              <a:pPr/>
-              <a:t>18</a:t>
-            </a:fld>
-            <a:endParaRPr lang="en-US" dirty="0"/>
-          </a:p>
-        </p:txBody>
-      </p:sp>
-      <p:pic>
-        <p:nvPicPr>
-          <p:cNvPr id="4" name="Picture 3">
-            <a:extLst>
-              <a:ext uri="{FF2B5EF4-FFF2-40B4-BE49-F238E27FC236}">
-                <a16:creationId xmlns:a16="http://schemas.microsoft.com/office/drawing/2014/main" id="{A0B6090D-5772-99AD-5EFE-0541A85E4A51}"/>
-              </a:ext>
-            </a:extLst>
-          </p:cNvPr>
-          <p:cNvPicPr>
-            <a:picLocks noChangeAspect="1"/>
-          </p:cNvPicPr>
-          <p:nvPr/>
-        </p:nvPicPr>
-        <p:blipFill>
-          <a:blip r:embed="rId2"/>
-          <a:stretch>
-            <a:fillRect/>
-          </a:stretch>
-        </p:blipFill>
-        <p:spPr>
-          <a:xfrm>
-            <a:off x="4686300" y="1554958"/>
-            <a:ext cx="6667500" cy="4114800"/>
-          </a:xfrm>
-          <a:prstGeom prst="rect">
-            <a:avLst/>
-          </a:prstGeom>
-        </p:spPr>
-      </p:pic>
-    </p:spTree>
-    <p:extLst>
-      <p:ext uri="{BB962C8B-B14F-4D97-AF65-F5344CB8AC3E}">
-        <p14:creationId xmlns:p14="http://schemas.microsoft.com/office/powerpoint/2010/main" val="1747858255"/>
       </p:ext>
     </p:extLst>
   </p:cSld>
@@ -17879,179 +18486,392 @@
       </p:grpSpPr>
       <p:sp>
         <p:nvSpPr>
-          <p:cNvPr id="3" name="Subtitle 2">
-            <a:extLst>
-              <a:ext uri="{FF2B5EF4-FFF2-40B4-BE49-F238E27FC236}">
-                <a16:creationId xmlns:a16="http://schemas.microsoft.com/office/drawing/2014/main" id="{35E3EA69-4E0E-41BD-8095-A124225A2647}"/>
-              </a:ext>
-              <a:ext uri="{C183D7F6-B498-43B3-948B-1728B52AA6E4}">
-                <adec:decorative xmlns:adec="http://schemas.microsoft.com/office/drawing/2017/decorative" val="0"/>
-              </a:ext>
-            </a:extLst>
-          </p:cNvPr>
-          <p:cNvSpPr>
-            <a:spLocks noGrp="1"/>
-          </p:cNvSpPr>
-          <p:nvPr>
-            <p:ph sz="quarter" idx="21"/>
-          </p:nvPr>
-        </p:nvSpPr>
-        <p:spPr>
-          <a:xfrm>
-            <a:off x="1075447" y="2370670"/>
-            <a:ext cx="1856232" cy="1664208"/>
-          </a:xfrm>
-        </p:spPr>
-        <p:txBody>
-          <a:bodyPr>
+          <p:cNvPr id="21" name="Symbol zastępczy numeru slajdu 20">
+            <a:extLst>
+              <a:ext uri="{FF2B5EF4-FFF2-40B4-BE49-F238E27FC236}">
+                <a16:creationId xmlns:a16="http://schemas.microsoft.com/office/drawing/2014/main" id="{FD889D46-A756-2FDB-235E-499F06252485}"/>
+              </a:ext>
+            </a:extLst>
+          </p:cNvPr>
+          <p:cNvSpPr>
+            <a:spLocks noGrp="1"/>
+          </p:cNvSpPr>
+          <p:nvPr>
+            <p:ph type="sldNum" sz="quarter" idx="12"/>
+          </p:nvPr>
+        </p:nvSpPr>
+        <p:spPr/>
+        <p:txBody>
+          <a:bodyPr/>
+          <a:lstStyle/>
+          <a:p>
+            <a:fld id="{B5CEABB6-07DC-46E8-9B57-56EC44A396E5}" type="slidenum">
+              <a:rPr lang="en-US" smtClean="0"/>
+              <a:t>2</a:t>
+            </a:fld>
+            <a:endParaRPr lang="en-US" dirty="0"/>
+          </a:p>
+        </p:txBody>
+      </p:sp>
+      <p:sp>
+        <p:nvSpPr>
+          <p:cNvPr id="22" name="pole tekstowe 21">
+            <a:extLst>
+              <a:ext uri="{FF2B5EF4-FFF2-40B4-BE49-F238E27FC236}">
+                <a16:creationId xmlns:a16="http://schemas.microsoft.com/office/drawing/2014/main" id="{C72EBD29-8475-2367-2F74-22D0AC2FEAF8}"/>
+              </a:ext>
+            </a:extLst>
+          </p:cNvPr>
+          <p:cNvSpPr txBox="1"/>
+          <p:nvPr/>
+        </p:nvSpPr>
+        <p:spPr>
+          <a:xfrm>
+            <a:off x="542441" y="1704814"/>
+            <a:ext cx="8500820" cy="2862322"/>
+          </a:xfrm>
+          <a:prstGeom prst="rect">
+            <a:avLst/>
+          </a:prstGeom>
+          <a:noFill/>
+        </p:spPr>
+        <p:txBody>
+          <a:bodyPr wrap="square" rtlCol="0">
+            <a:spAutoFit/>
+          </a:bodyPr>
+          <a:lstStyle/>
+          <a:p>
+            <a:pPr marL="342900" indent="-342900">
+              <a:buAutoNum type="arabicPeriod"/>
+            </a:pPr>
+            <a:r>
+              <a:rPr lang="pl-PL" dirty="0"/>
+              <a:t>Wprowadzenie</a:t>
+            </a:r>
+          </a:p>
+          <a:p>
+            <a:pPr marL="342900" indent="-342900">
+              <a:buAutoNum type="arabicPeriod"/>
+            </a:pPr>
+            <a:r>
+              <a:rPr lang="pl-PL" dirty="0"/>
+              <a:t>Problem badawczy i pytania</a:t>
+            </a:r>
+          </a:p>
+          <a:p>
+            <a:pPr marL="342900" indent="-342900">
+              <a:buAutoNum type="arabicPeriod"/>
+            </a:pPr>
+            <a:r>
+              <a:rPr lang="pl-PL" dirty="0"/>
+              <a:t>Przegląd literatury</a:t>
+            </a:r>
+          </a:p>
+          <a:p>
+            <a:pPr marL="342900" indent="-342900">
+              <a:buAutoNum type="arabicPeriod"/>
+            </a:pPr>
+            <a:r>
+              <a:rPr lang="pl-PL" dirty="0"/>
+              <a:t>Opis danych</a:t>
+            </a:r>
+          </a:p>
+          <a:p>
+            <a:pPr marL="342900" indent="-342900">
+              <a:buAutoNum type="arabicPeriod"/>
+            </a:pPr>
+            <a:r>
+              <a:rPr lang="pl-PL" dirty="0"/>
+              <a:t>Wstępna analiza danych</a:t>
+            </a:r>
+          </a:p>
+          <a:p>
+            <a:pPr marL="342900" indent="-342900">
+              <a:buAutoNum type="arabicPeriod"/>
+            </a:pPr>
+            <a:r>
+              <a:rPr lang="pl-PL" dirty="0"/>
+              <a:t>Eksploracyjna analiza danych przestrzennych (ESDA)</a:t>
+            </a:r>
+          </a:p>
+          <a:p>
+            <a:pPr marL="342900" indent="-342900">
+              <a:buAutoNum type="arabicPeriod"/>
+            </a:pPr>
+            <a:r>
+              <a:rPr lang="pl-PL" dirty="0"/>
+              <a:t>Modelowanie ekonometryczne</a:t>
+            </a:r>
+          </a:p>
+          <a:p>
+            <a:pPr marL="342900" indent="-342900">
+              <a:buAutoNum type="arabicPeriod"/>
+            </a:pPr>
+            <a:r>
+              <a:rPr lang="pl-PL" dirty="0"/>
+              <a:t>Ocena modelu</a:t>
+            </a:r>
+          </a:p>
+          <a:p>
+            <a:pPr marL="342900" indent="-342900">
+              <a:buAutoNum type="arabicPeriod"/>
+            </a:pPr>
+            <a:r>
+              <a:rPr lang="pl-PL" dirty="0"/>
+              <a:t>Wnioski i rekomendacje</a:t>
+            </a:r>
+          </a:p>
+          <a:p>
+            <a:pPr marL="342900" indent="-342900">
+              <a:buAutoNum type="arabicPeriod"/>
+            </a:pPr>
+            <a:r>
+              <a:rPr lang="pl-PL" dirty="0"/>
+              <a:t>Zakończenie i pytania</a:t>
+            </a:r>
+          </a:p>
+        </p:txBody>
+      </p:sp>
+      <p:sp>
+        <p:nvSpPr>
+          <p:cNvPr id="23" name="Tytuł 1">
+            <a:extLst>
+              <a:ext uri="{FF2B5EF4-FFF2-40B4-BE49-F238E27FC236}">
+                <a16:creationId xmlns:a16="http://schemas.microsoft.com/office/drawing/2014/main" id="{FD10A6CE-38D6-C94E-9065-2961D4582F0D}"/>
+              </a:ext>
+            </a:extLst>
+          </p:cNvPr>
+          <p:cNvSpPr txBox="1">
+            <a:spLocks/>
+          </p:cNvSpPr>
+          <p:nvPr/>
+        </p:nvSpPr>
+        <p:spPr>
+          <a:xfrm>
+            <a:off x="0" y="0"/>
+            <a:ext cx="3006671" cy="666427"/>
+          </a:xfrm>
+          <a:prstGeom prst="rect">
+            <a:avLst/>
+          </a:prstGeom>
+        </p:spPr>
+        <p:txBody>
+          <a:bodyPr vert="horz" lIns="91440" tIns="45720" rIns="91440" bIns="45720" rtlCol="0" anchor="ctr">
             <a:normAutofit/>
           </a:bodyPr>
-          <a:lstStyle/>
-          <a:p>
-            <a:pPr algn="l">
-              <a:buNone/>
-            </a:pPr>
-            <a:r>
-              <a:rPr lang="pl-PL" b="0" i="0" dirty="0">
-                <a:solidFill>
-                  <a:srgbClr val="222222"/>
-                </a:solidFill>
-                <a:effectLst/>
-                <a:latin typeface="Arial" panose="020B0604020202020204" pitchFamily="34" charset="0"/>
-              </a:rPr>
-              <a:t>Zaprojektowanie prezentacji w </a:t>
-            </a:r>
-            <a:r>
-              <a:rPr lang="pl-PL" b="0" i="0" dirty="0" err="1">
-                <a:solidFill>
-                  <a:srgbClr val="222222"/>
-                </a:solidFill>
-                <a:effectLst/>
-                <a:latin typeface="Arial" panose="020B0604020202020204" pitchFamily="34" charset="0"/>
-              </a:rPr>
-              <a:t>powerpoint</a:t>
-            </a:r>
-            <a:r>
-              <a:rPr lang="pl-PL" b="0" i="0" dirty="0">
-                <a:solidFill>
-                  <a:srgbClr val="222222"/>
-                </a:solidFill>
-                <a:effectLst/>
-                <a:latin typeface="Arial" panose="020B0604020202020204" pitchFamily="34" charset="0"/>
-              </a:rPr>
-              <a:t> - dodanie punktu 2,3,4,5 (podpunkt </a:t>
-            </a:r>
-            <a:r>
-              <a:rPr lang="pl-PL" b="0" i="0" dirty="0" err="1">
-                <a:solidFill>
-                  <a:srgbClr val="222222"/>
-                </a:solidFill>
-                <a:effectLst/>
-                <a:latin typeface="Arial" panose="020B0604020202020204" pitchFamily="34" charset="0"/>
-              </a:rPr>
-              <a:t>a,b</a:t>
-            </a:r>
-            <a:r>
-              <a:rPr lang="pl-PL" b="0" i="0" dirty="0">
-                <a:solidFill>
-                  <a:srgbClr val="222222"/>
-                </a:solidFill>
-                <a:effectLst/>
-                <a:latin typeface="Arial" panose="020B0604020202020204" pitchFamily="34" charset="0"/>
-              </a:rPr>
-              <a:t>)</a:t>
-            </a:r>
-          </a:p>
-          <a:p>
-            <a:pPr algn="l"/>
-            <a:r>
-              <a:rPr lang="pl-PL" b="0" i="0" dirty="0">
-                <a:solidFill>
-                  <a:srgbClr val="666666"/>
-                </a:solidFill>
-                <a:effectLst/>
-                <a:latin typeface="Arial" panose="020B0604020202020204" pitchFamily="34" charset="0"/>
-              </a:rPr>
-              <a:t>—</a:t>
-            </a:r>
-          </a:p>
-        </p:txBody>
-      </p:sp>
-      <p:sp>
-        <p:nvSpPr>
-          <p:cNvPr id="12" name="Text Placeholder 3">
-            <a:extLst>
-              <a:ext uri="{FF2B5EF4-FFF2-40B4-BE49-F238E27FC236}">
-                <a16:creationId xmlns:a16="http://schemas.microsoft.com/office/drawing/2014/main" id="{52754FA1-2477-8F27-DF3F-88ACDF9CD510}"/>
-              </a:ext>
-            </a:extLst>
-          </p:cNvPr>
-          <p:cNvSpPr>
-            <a:spLocks noGrp="1"/>
-          </p:cNvSpPr>
-          <p:nvPr>
-            <p:ph type="body" idx="1"/>
-          </p:nvPr>
-        </p:nvSpPr>
-        <p:spPr>
-          <a:xfrm>
-            <a:off x="838200" y="3788813"/>
-            <a:ext cx="2330726" cy="804859"/>
+          <a:lstStyle>
+            <a:lvl1pPr algn="ctr" defTabSz="914400" rtl="0" eaLnBrk="1" latinLnBrk="0" hangingPunct="1">
+              <a:lnSpc>
+                <a:spcPct val="90000"/>
+              </a:lnSpc>
+              <a:spcBef>
+                <a:spcPct val="0"/>
+              </a:spcBef>
+              <a:buNone/>
+              <a:defRPr lang="en-US" sz="2800" kern="1200" cap="all" spc="150" baseline="0" dirty="0">
+                <a:solidFill>
+                  <a:schemeClr val="tx1">
+                    <a:lumMod val="75000"/>
+                    <a:lumOff val="25000"/>
+                  </a:schemeClr>
+                </a:solidFill>
+                <a:latin typeface="+mj-lt"/>
+                <a:ea typeface="+mj-ea"/>
+                <a:cs typeface="+mj-cs"/>
+              </a:defRPr>
+            </a:lvl1pPr>
+          </a:lstStyle>
+          <a:p>
+            <a:r>
+              <a:rPr lang="pl-PL" dirty="0"/>
+              <a:t>Spis treści</a:t>
+            </a:r>
+          </a:p>
+        </p:txBody>
+      </p:sp>
+    </p:spTree>
+    <p:extLst>
+      <p:ext uri="{BB962C8B-B14F-4D97-AF65-F5344CB8AC3E}">
+        <p14:creationId xmlns:p14="http://schemas.microsoft.com/office/powerpoint/2010/main" val="3672404"/>
+      </p:ext>
+    </p:extLst>
+  </p:cSld>
+  <p:clrMapOvr>
+    <a:masterClrMapping/>
+  </p:clrMapOvr>
+</p:sld>
+</file>
+
+<file path=ppt/slides/slide20.xml><?xml version="1.0" encoding="utf-8"?>
+<p:sld xmlns:a="http://schemas.openxmlformats.org/drawingml/2006/main" xmlns:r="http://schemas.openxmlformats.org/officeDocument/2006/relationships" xmlns:p="http://schemas.openxmlformats.org/presentationml/2006/main">
+  <p:cSld>
+    <p:spTree>
+      <p:nvGrpSpPr>
+        <p:cNvPr id="1" name="">
+          <a:extLst>
+            <a:ext uri="{FF2B5EF4-FFF2-40B4-BE49-F238E27FC236}">
+              <a16:creationId xmlns:a16="http://schemas.microsoft.com/office/drawing/2014/main" id="{7A5B5218-5146-79A0-681F-78576DB8FE38}"/>
+            </a:ext>
+          </a:extLst>
+        </p:cNvPr>
+        <p:cNvGrpSpPr/>
+        <p:nvPr/>
+      </p:nvGrpSpPr>
+      <p:grpSpPr>
+        <a:xfrm>
+          <a:off x="0" y="0"/>
+          <a:ext cx="0" cy="0"/>
+          <a:chOff x="0" y="0"/>
+          <a:chExt cx="0" cy="0"/>
+        </a:xfrm>
+      </p:grpSpPr>
+      <p:sp>
+        <p:nvSpPr>
+          <p:cNvPr id="2" name="Title 1">
+            <a:extLst>
+              <a:ext uri="{FF2B5EF4-FFF2-40B4-BE49-F238E27FC236}">
+                <a16:creationId xmlns:a16="http://schemas.microsoft.com/office/drawing/2014/main" id="{7B9D52CA-6952-1A0A-BBB0-1DAC522F54EC}"/>
+              </a:ext>
+            </a:extLst>
+          </p:cNvPr>
+          <p:cNvSpPr>
+            <a:spLocks noGrp="1"/>
+          </p:cNvSpPr>
+          <p:nvPr>
+            <p:ph type="title"/>
+          </p:nvPr>
+        </p:nvSpPr>
+        <p:spPr>
+          <a:xfrm>
+            <a:off x="1560512" y="229395"/>
+            <a:ext cx="8421688" cy="1325563"/>
           </a:xfrm>
         </p:spPr>
         <p:txBody>
           <a:bodyPr/>
           <a:lstStyle/>
           <a:p>
-            <a:endParaRPr lang="en-US"/>
-          </a:p>
-        </p:txBody>
-      </p:sp>
-      <p:sp>
-        <p:nvSpPr>
-          <p:cNvPr id="14" name="Text Placeholder 4">
-            <a:extLst>
-              <a:ext uri="{FF2B5EF4-FFF2-40B4-BE49-F238E27FC236}">
-                <a16:creationId xmlns:a16="http://schemas.microsoft.com/office/drawing/2014/main" id="{B08A1C6A-582D-9D79-7DF5-BBD59C5BAAE0}"/>
-              </a:ext>
-            </a:extLst>
-          </p:cNvPr>
-          <p:cNvSpPr>
-            <a:spLocks noGrp="1"/>
-          </p:cNvSpPr>
-          <p:nvPr>
-            <p:ph type="body" idx="17"/>
-          </p:nvPr>
-        </p:nvSpPr>
-        <p:spPr>
-          <a:xfrm>
-            <a:off x="838200" y="4464810"/>
-            <a:ext cx="2330726" cy="438505"/>
+            <a:r>
+              <a:rPr lang="en-US" dirty="0"/>
+              <a:t>MARKET OVERVIEW</a:t>
+            </a:r>
+          </a:p>
+        </p:txBody>
+      </p:sp>
+      <p:sp>
+        <p:nvSpPr>
+          <p:cNvPr id="9" name="Date Placeholder 8">
+            <a:extLst>
+              <a:ext uri="{FF2B5EF4-FFF2-40B4-BE49-F238E27FC236}">
+                <a16:creationId xmlns:a16="http://schemas.microsoft.com/office/drawing/2014/main" id="{B4FA31FD-8498-DB1F-1E78-A65D48ADE1C8}"/>
+              </a:ext>
+            </a:extLst>
+          </p:cNvPr>
+          <p:cNvSpPr>
+            <a:spLocks noGrp="1"/>
+          </p:cNvSpPr>
+          <p:nvPr>
+            <p:ph type="dt" sz="half" idx="10"/>
+          </p:nvPr>
+        </p:nvSpPr>
+        <p:spPr>
+          <a:xfrm>
+            <a:off x="838200" y="6356350"/>
+            <a:ext cx="2743200" cy="365125"/>
           </a:xfrm>
         </p:spPr>
         <p:txBody>
           <a:bodyPr/>
           <a:lstStyle/>
           <a:p>
-            <a:endParaRPr lang="en-US"/>
+            <a:r>
+              <a:rPr lang="en-US" dirty="0"/>
+              <a:t>20XX</a:t>
+            </a:r>
+          </a:p>
+        </p:txBody>
+      </p:sp>
+      <p:sp>
+        <p:nvSpPr>
+          <p:cNvPr id="10" name="Footer Placeholder 9">
+            <a:extLst>
+              <a:ext uri="{FF2B5EF4-FFF2-40B4-BE49-F238E27FC236}">
+                <a16:creationId xmlns:a16="http://schemas.microsoft.com/office/drawing/2014/main" id="{4044E3A9-D818-9454-F7F2-E6BF13813091}"/>
+              </a:ext>
+            </a:extLst>
+          </p:cNvPr>
+          <p:cNvSpPr>
+            <a:spLocks noGrp="1"/>
+          </p:cNvSpPr>
+          <p:nvPr>
+            <p:ph type="ftr" sz="quarter" idx="11"/>
+          </p:nvPr>
+        </p:nvSpPr>
+        <p:spPr>
+          <a:xfrm>
+            <a:off x="4038600" y="6356350"/>
+            <a:ext cx="4114800" cy="365125"/>
+          </a:xfrm>
+        </p:spPr>
+        <p:txBody>
+          <a:bodyPr/>
+          <a:lstStyle/>
+          <a:p>
+            <a:r>
+              <a:rPr lang="en-US" dirty="0"/>
+              <a:t>Pitch Deck</a:t>
+            </a:r>
+          </a:p>
+        </p:txBody>
+      </p:sp>
+      <p:sp>
+        <p:nvSpPr>
+          <p:cNvPr id="11" name="Slide Number Placeholder 10">
+            <a:extLst>
+              <a:ext uri="{FF2B5EF4-FFF2-40B4-BE49-F238E27FC236}">
+                <a16:creationId xmlns:a16="http://schemas.microsoft.com/office/drawing/2014/main" id="{0F8F46C2-36F7-2B51-C1D8-EB50E70B3D6D}"/>
+              </a:ext>
+            </a:extLst>
+          </p:cNvPr>
+          <p:cNvSpPr>
+            <a:spLocks noGrp="1"/>
+          </p:cNvSpPr>
+          <p:nvPr>
+            <p:ph type="sldNum" sz="quarter" idx="12"/>
+          </p:nvPr>
+        </p:nvSpPr>
+        <p:spPr>
+          <a:xfrm>
+            <a:off x="8610600" y="6356350"/>
+            <a:ext cx="2743200" cy="365125"/>
+          </a:xfrm>
+        </p:spPr>
+        <p:txBody>
+          <a:bodyPr/>
+          <a:lstStyle/>
+          <a:p>
+            <a:fld id="{B5CEABB6-07DC-46E8-9B57-56EC44A396E5}" type="slidenum">
+              <a:rPr lang="en-US" smtClean="0"/>
+              <a:pPr/>
+              <a:t>20</a:t>
+            </a:fld>
+            <a:endParaRPr lang="en-US" dirty="0"/>
           </a:p>
         </p:txBody>
       </p:sp>
       <p:pic>
         <p:nvPicPr>
-          <p:cNvPr id="18" name="Content Placeholder 17" descr="A graph with purple bars&#10;&#10;AI-generated content may be incorrect.">
-            <a:extLst>
-              <a:ext uri="{FF2B5EF4-FFF2-40B4-BE49-F238E27FC236}">
-                <a16:creationId xmlns:a16="http://schemas.microsoft.com/office/drawing/2014/main" id="{5C5B3E88-8731-C354-E01A-3BB4C000CF57}"/>
+          <p:cNvPr id="3" name="Picture 2">
+            <a:extLst>
+              <a:ext uri="{FF2B5EF4-FFF2-40B4-BE49-F238E27FC236}">
+                <a16:creationId xmlns:a16="http://schemas.microsoft.com/office/drawing/2014/main" id="{A100AEA6-2192-F118-CDAE-6BB71193E12E}"/>
               </a:ext>
             </a:extLst>
           </p:cNvPr>
           <p:cNvPicPr>
-            <a:picLocks noGrp="1" noChangeAspect="1"/>
+            <a:picLocks noChangeAspect="1"/>
           </p:cNvPicPr>
-          <p:nvPr>
-            <p:ph sz="half" idx="2"/>
-          </p:nvPr>
+          <p:nvPr/>
         </p:nvPicPr>
         <p:blipFill>
           <a:blip r:embed="rId2"/>
@@ -18061,15 +18881,218 @@
         </p:blipFill>
         <p:spPr>
           <a:xfrm>
-            <a:off x="3891948" y="1279261"/>
-            <a:ext cx="6966744" cy="4299477"/>
-          </a:xfrm>
+            <a:off x="4819650" y="1554958"/>
+            <a:ext cx="6667500" cy="4114800"/>
+          </a:xfrm>
+          <a:prstGeom prst="rect">
+            <a:avLst/>
+          </a:prstGeom>
         </p:spPr>
       </p:pic>
     </p:spTree>
     <p:extLst>
       <p:ext uri="{BB962C8B-B14F-4D97-AF65-F5344CB8AC3E}">
-        <p14:creationId xmlns:p14="http://schemas.microsoft.com/office/powerpoint/2010/main" val="2243494996"/>
+        <p14:creationId xmlns:p14="http://schemas.microsoft.com/office/powerpoint/2010/main" val="304014284"/>
+      </p:ext>
+    </p:extLst>
+  </p:cSld>
+  <p:clrMapOvr>
+    <a:masterClrMapping/>
+  </p:clrMapOvr>
+</p:sld>
+</file>
+
+<file path=ppt/slides/slide21.xml><?xml version="1.0" encoding="utf-8"?>
+<p:sld xmlns:a="http://schemas.openxmlformats.org/drawingml/2006/main" xmlns:r="http://schemas.openxmlformats.org/officeDocument/2006/relationships" xmlns:p="http://schemas.openxmlformats.org/presentationml/2006/main">
+  <p:cSld>
+    <p:spTree>
+      <p:nvGrpSpPr>
+        <p:cNvPr id="1" name="">
+          <a:extLst>
+            <a:ext uri="{FF2B5EF4-FFF2-40B4-BE49-F238E27FC236}">
+              <a16:creationId xmlns:a16="http://schemas.microsoft.com/office/drawing/2014/main" id="{5F34708D-24CA-4D67-66DC-BEE28E256701}"/>
+            </a:ext>
+          </a:extLst>
+        </p:cNvPr>
+        <p:cNvGrpSpPr/>
+        <p:nvPr/>
+      </p:nvGrpSpPr>
+      <p:grpSpPr>
+        <a:xfrm>
+          <a:off x="0" y="0"/>
+          <a:ext cx="0" cy="0"/>
+          <a:chOff x="0" y="0"/>
+          <a:chExt cx="0" cy="0"/>
+        </a:xfrm>
+      </p:grpSpPr>
+      <p:sp>
+        <p:nvSpPr>
+          <p:cNvPr id="2" name="Title 1">
+            <a:extLst>
+              <a:ext uri="{FF2B5EF4-FFF2-40B4-BE49-F238E27FC236}">
+                <a16:creationId xmlns:a16="http://schemas.microsoft.com/office/drawing/2014/main" id="{30277119-A7E3-AFBA-65C5-92596AC8AA78}"/>
+              </a:ext>
+            </a:extLst>
+          </p:cNvPr>
+          <p:cNvSpPr>
+            <a:spLocks noGrp="1"/>
+          </p:cNvSpPr>
+          <p:nvPr>
+            <p:ph type="title"/>
+          </p:nvPr>
+        </p:nvSpPr>
+        <p:spPr>
+          <a:xfrm>
+            <a:off x="1560512" y="229395"/>
+            <a:ext cx="8421688" cy="1325563"/>
+          </a:xfrm>
+        </p:spPr>
+        <p:txBody>
+          <a:bodyPr/>
+          <a:lstStyle/>
+          <a:p>
+            <a:r>
+              <a:rPr lang="en-US" dirty="0"/>
+              <a:t>MARKET OVERVIEW</a:t>
+            </a:r>
+          </a:p>
+        </p:txBody>
+      </p:sp>
+      <p:sp>
+        <p:nvSpPr>
+          <p:cNvPr id="9" name="Date Placeholder 8">
+            <a:extLst>
+              <a:ext uri="{FF2B5EF4-FFF2-40B4-BE49-F238E27FC236}">
+                <a16:creationId xmlns:a16="http://schemas.microsoft.com/office/drawing/2014/main" id="{05EF780F-E8A7-F88D-FF69-C4CF95B077B0}"/>
+              </a:ext>
+            </a:extLst>
+          </p:cNvPr>
+          <p:cNvSpPr>
+            <a:spLocks noGrp="1"/>
+          </p:cNvSpPr>
+          <p:nvPr>
+            <p:ph type="dt" sz="half" idx="10"/>
+          </p:nvPr>
+        </p:nvSpPr>
+        <p:spPr>
+          <a:xfrm>
+            <a:off x="838200" y="6356350"/>
+            <a:ext cx="2743200" cy="365125"/>
+          </a:xfrm>
+        </p:spPr>
+        <p:txBody>
+          <a:bodyPr/>
+          <a:lstStyle/>
+          <a:p>
+            <a:r>
+              <a:rPr lang="en-US" dirty="0"/>
+              <a:t>20XX</a:t>
+            </a:r>
+          </a:p>
+        </p:txBody>
+      </p:sp>
+      <p:sp>
+        <p:nvSpPr>
+          <p:cNvPr id="10" name="Footer Placeholder 9">
+            <a:extLst>
+              <a:ext uri="{FF2B5EF4-FFF2-40B4-BE49-F238E27FC236}">
+                <a16:creationId xmlns:a16="http://schemas.microsoft.com/office/drawing/2014/main" id="{A2939AFD-EB64-6BF9-02CA-9AB7723492B0}"/>
+              </a:ext>
+            </a:extLst>
+          </p:cNvPr>
+          <p:cNvSpPr>
+            <a:spLocks noGrp="1"/>
+          </p:cNvSpPr>
+          <p:nvPr>
+            <p:ph type="ftr" sz="quarter" idx="11"/>
+          </p:nvPr>
+        </p:nvSpPr>
+        <p:spPr>
+          <a:xfrm>
+            <a:off x="4038600" y="6356350"/>
+            <a:ext cx="4114800" cy="365125"/>
+          </a:xfrm>
+        </p:spPr>
+        <p:txBody>
+          <a:bodyPr/>
+          <a:lstStyle/>
+          <a:p>
+            <a:r>
+              <a:rPr lang="en-US" dirty="0"/>
+              <a:t>Pitch Deck</a:t>
+            </a:r>
+          </a:p>
+        </p:txBody>
+      </p:sp>
+      <p:sp>
+        <p:nvSpPr>
+          <p:cNvPr id="11" name="Slide Number Placeholder 10">
+            <a:extLst>
+              <a:ext uri="{FF2B5EF4-FFF2-40B4-BE49-F238E27FC236}">
+                <a16:creationId xmlns:a16="http://schemas.microsoft.com/office/drawing/2014/main" id="{0FF8FAA6-EC22-4989-7A0E-50E6B3D1BCD1}"/>
+              </a:ext>
+            </a:extLst>
+          </p:cNvPr>
+          <p:cNvSpPr>
+            <a:spLocks noGrp="1"/>
+          </p:cNvSpPr>
+          <p:nvPr>
+            <p:ph type="sldNum" sz="quarter" idx="12"/>
+          </p:nvPr>
+        </p:nvSpPr>
+        <p:spPr>
+          <a:xfrm>
+            <a:off x="8610600" y="6356350"/>
+            <a:ext cx="2743200" cy="365125"/>
+          </a:xfrm>
+        </p:spPr>
+        <p:txBody>
+          <a:bodyPr/>
+          <a:lstStyle/>
+          <a:p>
+            <a:fld id="{B5CEABB6-07DC-46E8-9B57-56EC44A396E5}" type="slidenum">
+              <a:rPr lang="en-US" smtClean="0"/>
+              <a:pPr/>
+              <a:t>21</a:t>
+            </a:fld>
+            <a:endParaRPr lang="en-US" dirty="0"/>
+          </a:p>
+        </p:txBody>
+      </p:sp>
+      <p:pic>
+        <p:nvPicPr>
+          <p:cNvPr id="4" name="Picture 3">
+            <a:extLst>
+              <a:ext uri="{FF2B5EF4-FFF2-40B4-BE49-F238E27FC236}">
+                <a16:creationId xmlns:a16="http://schemas.microsoft.com/office/drawing/2014/main" id="{A0B6090D-5772-99AD-5EFE-0541A85E4A51}"/>
+              </a:ext>
+            </a:extLst>
+          </p:cNvPr>
+          <p:cNvPicPr>
+            <a:picLocks noChangeAspect="1"/>
+          </p:cNvPicPr>
+          <p:nvPr/>
+        </p:nvPicPr>
+        <p:blipFill>
+          <a:blip r:embed="rId2"/>
+          <a:stretch>
+            <a:fillRect/>
+          </a:stretch>
+        </p:blipFill>
+        <p:spPr>
+          <a:xfrm>
+            <a:off x="4686300" y="1554958"/>
+            <a:ext cx="6667500" cy="4114800"/>
+          </a:xfrm>
+          <a:prstGeom prst="rect">
+            <a:avLst/>
+          </a:prstGeom>
+        </p:spPr>
+      </p:pic>
+    </p:spTree>
+    <p:extLst>
+      <p:ext uri="{BB962C8B-B14F-4D97-AF65-F5344CB8AC3E}">
+        <p14:creationId xmlns:p14="http://schemas.microsoft.com/office/powerpoint/2010/main" val="1747858255"/>
       </p:ext>
     </p:extLst>
   </p:cSld>
@@ -18098,6 +19121,820 @@
       </p:grpSpPr>
       <p:sp>
         <p:nvSpPr>
+          <p:cNvPr id="2" name="Tytuł 1">
+            <a:extLst>
+              <a:ext uri="{FF2B5EF4-FFF2-40B4-BE49-F238E27FC236}">
+                <a16:creationId xmlns:a16="http://schemas.microsoft.com/office/drawing/2014/main" id="{945DEF56-BBFA-0120-CDDB-512C966DD740}"/>
+              </a:ext>
+            </a:extLst>
+          </p:cNvPr>
+          <p:cNvSpPr>
+            <a:spLocks noGrp="1"/>
+          </p:cNvSpPr>
+          <p:nvPr>
+            <p:ph type="title"/>
+          </p:nvPr>
+        </p:nvSpPr>
+        <p:spPr>
+          <a:xfrm>
+            <a:off x="0" y="0"/>
+            <a:ext cx="3006671" cy="666427"/>
+          </a:xfrm>
+        </p:spPr>
+        <p:txBody>
+          <a:bodyPr>
+            <a:normAutofit/>
+          </a:bodyPr>
+          <a:lstStyle/>
+          <a:p>
+            <a:r>
+              <a:rPr lang="pl-PL" sz="2500" dirty="0"/>
+              <a:t>Wprowadzenie</a:t>
+            </a:r>
+          </a:p>
+        </p:txBody>
+      </p:sp>
+      <p:sp>
+        <p:nvSpPr>
+          <p:cNvPr id="22" name="pole tekstowe 21">
+            <a:extLst>
+              <a:ext uri="{FF2B5EF4-FFF2-40B4-BE49-F238E27FC236}">
+                <a16:creationId xmlns:a16="http://schemas.microsoft.com/office/drawing/2014/main" id="{65AFD9F2-2373-2C66-F53B-50D283F501CC}"/>
+              </a:ext>
+            </a:extLst>
+          </p:cNvPr>
+          <p:cNvSpPr txBox="1"/>
+          <p:nvPr/>
+        </p:nvSpPr>
+        <p:spPr>
+          <a:xfrm>
+            <a:off x="123986" y="666427"/>
+            <a:ext cx="11941445" cy="369332"/>
+          </a:xfrm>
+          <a:prstGeom prst="rect">
+            <a:avLst/>
+          </a:prstGeom>
+          <a:noFill/>
+        </p:spPr>
+        <p:txBody>
+          <a:bodyPr wrap="square" rtlCol="0">
+            <a:spAutoFit/>
+          </a:bodyPr>
+          <a:lstStyle/>
+          <a:p>
+            <a:r>
+              <a:rPr lang="pl-PL" dirty="0"/>
+              <a:t>Analiza przestrzenna statusu społeczno-ekonomicznego uczniów w badaniach PISA (2012-2018)</a:t>
+            </a:r>
+          </a:p>
+        </p:txBody>
+      </p:sp>
+      <p:sp>
+        <p:nvSpPr>
+          <p:cNvPr id="23" name="pole tekstowe 22">
+            <a:extLst>
+              <a:ext uri="{FF2B5EF4-FFF2-40B4-BE49-F238E27FC236}">
+                <a16:creationId xmlns:a16="http://schemas.microsoft.com/office/drawing/2014/main" id="{9779D17E-FE90-2B9E-9660-AB5083B29584}"/>
+              </a:ext>
+            </a:extLst>
+          </p:cNvPr>
+          <p:cNvSpPr txBox="1"/>
+          <p:nvPr/>
+        </p:nvSpPr>
+        <p:spPr>
+          <a:xfrm>
+            <a:off x="271219" y="1859339"/>
+            <a:ext cx="5718875" cy="3139321"/>
+          </a:xfrm>
+          <a:prstGeom prst="rect">
+            <a:avLst/>
+          </a:prstGeom>
+          <a:noFill/>
+        </p:spPr>
+        <p:txBody>
+          <a:bodyPr wrap="square" rtlCol="0">
+            <a:spAutoFit/>
+          </a:bodyPr>
+          <a:lstStyle/>
+          <a:p>
+            <a:pPr marL="285750" indent="-285750">
+              <a:buFontTx/>
+              <a:buChar char="-"/>
+            </a:pPr>
+            <a:r>
+              <a:rPr lang="pl-PL" b="1" dirty="0"/>
+              <a:t>Cel projektu: </a:t>
+            </a:r>
+            <a:r>
+              <a:rPr lang="pl-PL" dirty="0"/>
+              <a:t>Analiza przestrzennego zróżnicowania statusu społeczno-ekonomicznego uczniów na podstawie PISA z lat 2012-2018</a:t>
+            </a:r>
+          </a:p>
+          <a:p>
+            <a:pPr marL="285750" indent="-285750">
+              <a:buFontTx/>
+              <a:buChar char="-"/>
+            </a:pPr>
+            <a:endParaRPr lang="pl-PL" dirty="0"/>
+          </a:p>
+          <a:p>
+            <a:pPr marL="285750" indent="-285750">
+              <a:buFontTx/>
+              <a:buChar char="-"/>
+            </a:pPr>
+            <a:r>
+              <a:rPr lang="pl-PL" b="1" dirty="0"/>
+              <a:t>Znaczenie tematu: </a:t>
+            </a:r>
+            <a:r>
+              <a:rPr lang="pl-PL" dirty="0"/>
+              <a:t>Rola edukacji jako czynnika wyrównania szans i narzędzia polityki społecznej, szczególnie w kontekście regionalnych dysproporcji</a:t>
+            </a:r>
+          </a:p>
+          <a:p>
+            <a:pPr marL="285750" indent="-285750">
+              <a:buFontTx/>
+              <a:buChar char="-"/>
+            </a:pPr>
+            <a:endParaRPr lang="pl-PL" dirty="0"/>
+          </a:p>
+          <a:p>
+            <a:pPr marL="285750" indent="-285750">
+              <a:buFontTx/>
+              <a:buChar char="-"/>
+            </a:pPr>
+            <a:r>
+              <a:rPr lang="pl-PL" b="1" dirty="0"/>
+              <a:t>Podejście badawcze: </a:t>
+            </a:r>
+            <a:r>
+              <a:rPr lang="pl-PL" dirty="0"/>
+              <a:t>Zastosowanie metod ekonometrii przestrzennej do identyfikacji wzorców i zależności przestrzennych w danych edukacyjnych</a:t>
+            </a:r>
+          </a:p>
+        </p:txBody>
+      </p:sp>
+      <p:pic>
+        <p:nvPicPr>
+          <p:cNvPr id="1026" name="Picture 2" descr="PISA">
+            <a:extLst>
+              <a:ext uri="{FF2B5EF4-FFF2-40B4-BE49-F238E27FC236}">
+                <a16:creationId xmlns:a16="http://schemas.microsoft.com/office/drawing/2014/main" id="{607F2FEC-8D23-7D93-644F-A15C9D7E5635}"/>
+              </a:ext>
+            </a:extLst>
+          </p:cNvPr>
+          <p:cNvPicPr>
+            <a:picLocks noChangeAspect="1" noChangeArrowheads="1"/>
+          </p:cNvPicPr>
+          <p:nvPr/>
+        </p:nvPicPr>
+        <p:blipFill>
+          <a:blip r:embed="rId2">
+            <a:extLst>
+              <a:ext uri="{28A0092B-C50C-407E-A947-70E740481C1C}">
+                <a14:useLocalDpi xmlns:a14="http://schemas.microsoft.com/office/drawing/2010/main" val="0"/>
+              </a:ext>
+            </a:extLst>
+          </a:blip>
+          <a:srcRect/>
+          <a:stretch>
+            <a:fillRect/>
+          </a:stretch>
+        </p:blipFill>
+        <p:spPr bwMode="auto">
+          <a:xfrm>
+            <a:off x="6201907" y="2233550"/>
+            <a:ext cx="5581070" cy="2376315"/>
+          </a:xfrm>
+          <a:prstGeom prst="rect">
+            <a:avLst/>
+          </a:prstGeom>
+          <a:ln>
+            <a:noFill/>
+          </a:ln>
+          <a:effectLst>
+            <a:outerShdw blurRad="292100" dist="139700" dir="2700000" algn="tl" rotWithShape="0">
+              <a:srgbClr val="333333">
+                <a:alpha val="65000"/>
+              </a:srgbClr>
+            </a:outerShdw>
+          </a:effectLst>
+          <a:extLst>
+            <a:ext uri="{909E8E84-426E-40DD-AFC4-6F175D3DCCD1}">
+              <a14:hiddenFill xmlns:a14="http://schemas.microsoft.com/office/drawing/2010/main">
+                <a:solidFill>
+                  <a:srgbClr val="FFFFFF"/>
+                </a:solidFill>
+              </a14:hiddenFill>
+            </a:ext>
+          </a:extLst>
+        </p:spPr>
+      </p:pic>
+      <p:sp>
+        <p:nvSpPr>
+          <p:cNvPr id="24" name="pole tekstowe 23">
+            <a:extLst>
+              <a:ext uri="{FF2B5EF4-FFF2-40B4-BE49-F238E27FC236}">
+                <a16:creationId xmlns:a16="http://schemas.microsoft.com/office/drawing/2014/main" id="{56148962-D495-452C-135E-DA78B8E6A19D}"/>
+              </a:ext>
+            </a:extLst>
+          </p:cNvPr>
+          <p:cNvSpPr txBox="1"/>
+          <p:nvPr/>
+        </p:nvSpPr>
+        <p:spPr>
+          <a:xfrm>
+            <a:off x="7005234" y="4609865"/>
+            <a:ext cx="4777743" cy="553998"/>
+          </a:xfrm>
+          <a:prstGeom prst="rect">
+            <a:avLst/>
+          </a:prstGeom>
+          <a:noFill/>
+        </p:spPr>
+        <p:txBody>
+          <a:bodyPr wrap="square" rtlCol="0">
+            <a:spAutoFit/>
+          </a:bodyPr>
+          <a:lstStyle/>
+          <a:p>
+            <a:pPr algn="r"/>
+            <a:r>
+              <a:rPr lang="pl-PL" sz="1200" dirty="0"/>
+              <a:t>Logo – PISA: Program Międzynarodowej Oceny Umiejętności Uczniów</a:t>
+            </a:r>
+          </a:p>
+          <a:p>
+            <a:endParaRPr lang="pl-PL" dirty="0"/>
+          </a:p>
+        </p:txBody>
+      </p:sp>
+    </p:spTree>
+    <p:extLst>
+      <p:ext uri="{BB962C8B-B14F-4D97-AF65-F5344CB8AC3E}">
+        <p14:creationId xmlns:p14="http://schemas.microsoft.com/office/powerpoint/2010/main" val="223487376"/>
+      </p:ext>
+    </p:extLst>
+  </p:cSld>
+  <p:clrMapOvr>
+    <a:masterClrMapping/>
+  </p:clrMapOvr>
+</p:sld>
+</file>
+
+<file path=ppt/slides/slide4.xml><?xml version="1.0" encoding="utf-8"?>
+<p:sld xmlns:a="http://schemas.openxmlformats.org/drawingml/2006/main" xmlns:r="http://schemas.openxmlformats.org/officeDocument/2006/relationships" xmlns:p="http://schemas.openxmlformats.org/presentationml/2006/main">
+  <p:cSld>
+    <p:spTree>
+      <p:nvGrpSpPr>
+        <p:cNvPr id="1" name="">
+          <a:extLst>
+            <a:ext uri="{FF2B5EF4-FFF2-40B4-BE49-F238E27FC236}">
+              <a16:creationId xmlns:a16="http://schemas.microsoft.com/office/drawing/2014/main" id="{4131D9D8-4D6E-6300-B19C-70538B0E4BEE}"/>
+            </a:ext>
+          </a:extLst>
+        </p:cNvPr>
+        <p:cNvGrpSpPr/>
+        <p:nvPr/>
+      </p:nvGrpSpPr>
+      <p:grpSpPr>
+        <a:xfrm>
+          <a:off x="0" y="0"/>
+          <a:ext cx="0" cy="0"/>
+          <a:chOff x="0" y="0"/>
+          <a:chExt cx="0" cy="0"/>
+        </a:xfrm>
+      </p:grpSpPr>
+      <p:sp>
+        <p:nvSpPr>
+          <p:cNvPr id="2" name="Tytuł 1">
+            <a:extLst>
+              <a:ext uri="{FF2B5EF4-FFF2-40B4-BE49-F238E27FC236}">
+                <a16:creationId xmlns:a16="http://schemas.microsoft.com/office/drawing/2014/main" id="{2514BB88-A9C8-D67C-71DF-BDC724845262}"/>
+              </a:ext>
+            </a:extLst>
+          </p:cNvPr>
+          <p:cNvSpPr>
+            <a:spLocks noGrp="1"/>
+          </p:cNvSpPr>
+          <p:nvPr>
+            <p:ph type="title"/>
+          </p:nvPr>
+        </p:nvSpPr>
+        <p:spPr>
+          <a:xfrm>
+            <a:off x="0" y="0"/>
+            <a:ext cx="5277173" cy="666427"/>
+          </a:xfrm>
+        </p:spPr>
+        <p:txBody>
+          <a:bodyPr>
+            <a:normAutofit fontScale="90000"/>
+          </a:bodyPr>
+          <a:lstStyle/>
+          <a:p>
+            <a:r>
+              <a:rPr lang="pl-PL" dirty="0"/>
+              <a:t>Problem badawczy i pytania</a:t>
+            </a:r>
+          </a:p>
+        </p:txBody>
+      </p:sp>
+      <p:sp>
+        <p:nvSpPr>
+          <p:cNvPr id="22" name="pole tekstowe 21">
+            <a:extLst>
+              <a:ext uri="{FF2B5EF4-FFF2-40B4-BE49-F238E27FC236}">
+                <a16:creationId xmlns:a16="http://schemas.microsoft.com/office/drawing/2014/main" id="{7199EF15-8849-0FA8-E734-29822BB84781}"/>
+              </a:ext>
+            </a:extLst>
+          </p:cNvPr>
+          <p:cNvSpPr txBox="1"/>
+          <p:nvPr/>
+        </p:nvSpPr>
+        <p:spPr>
+          <a:xfrm>
+            <a:off x="123986" y="666427"/>
+            <a:ext cx="11941445" cy="369332"/>
+          </a:xfrm>
+          <a:prstGeom prst="rect">
+            <a:avLst/>
+          </a:prstGeom>
+          <a:noFill/>
+        </p:spPr>
+        <p:txBody>
+          <a:bodyPr wrap="square" rtlCol="0">
+            <a:spAutoFit/>
+          </a:bodyPr>
+          <a:lstStyle/>
+          <a:p>
+            <a:r>
+              <a:rPr lang="pl-PL" dirty="0"/>
+              <a:t>Zróżnicowanie przestrzenne statusu społeczno-ekonomicznego uczniów</a:t>
+            </a:r>
+          </a:p>
+        </p:txBody>
+      </p:sp>
+      <p:sp>
+        <p:nvSpPr>
+          <p:cNvPr id="23" name="pole tekstowe 22">
+            <a:extLst>
+              <a:ext uri="{FF2B5EF4-FFF2-40B4-BE49-F238E27FC236}">
+                <a16:creationId xmlns:a16="http://schemas.microsoft.com/office/drawing/2014/main" id="{12DD4214-C1A6-C50B-916C-885C9E1928F7}"/>
+              </a:ext>
+            </a:extLst>
+          </p:cNvPr>
+          <p:cNvSpPr txBox="1"/>
+          <p:nvPr/>
+        </p:nvSpPr>
+        <p:spPr>
+          <a:xfrm>
+            <a:off x="271219" y="1859339"/>
+            <a:ext cx="5718875" cy="3416320"/>
+          </a:xfrm>
+          <a:prstGeom prst="rect">
+            <a:avLst/>
+          </a:prstGeom>
+          <a:noFill/>
+        </p:spPr>
+        <p:txBody>
+          <a:bodyPr wrap="square" rtlCol="0">
+            <a:spAutoFit/>
+          </a:bodyPr>
+          <a:lstStyle/>
+          <a:p>
+            <a:pPr marL="285750" indent="-285750">
+              <a:buFontTx/>
+              <a:buChar char="-"/>
+            </a:pPr>
+            <a:r>
+              <a:rPr lang="pl-PL" b="1" dirty="0"/>
+              <a:t>Sformułowanie problemu: </a:t>
+            </a:r>
+            <a:r>
+              <a:rPr lang="pl-PL" dirty="0"/>
+              <a:t>czy istnieją regionalne wzorce w statusie społeczno-ekonomicznym uczniów? Jakie czynniki wpływają na te różnice?</a:t>
+            </a:r>
+          </a:p>
+          <a:p>
+            <a:pPr marL="285750" indent="-285750">
+              <a:buFontTx/>
+              <a:buChar char="-"/>
+            </a:pPr>
+            <a:endParaRPr lang="pl-PL" dirty="0"/>
+          </a:p>
+          <a:p>
+            <a:pPr marL="285750" indent="-285750">
+              <a:buFontTx/>
+              <a:buChar char="-"/>
+            </a:pPr>
+            <a:r>
+              <a:rPr lang="pl-PL" b="1" dirty="0"/>
+              <a:t>Uzasadnienie wyboru: </a:t>
+            </a:r>
+            <a:r>
+              <a:rPr lang="pl-PL" dirty="0"/>
+              <a:t>Znaczące różnice w poziomie wyników edukacyjnych pomiędzy regionami sugerują wpływ czynników lokalnych</a:t>
+            </a:r>
+          </a:p>
+          <a:p>
+            <a:pPr marL="285750" indent="-285750">
+              <a:buFontTx/>
+              <a:buChar char="-"/>
+            </a:pPr>
+            <a:endParaRPr lang="pl-PL" dirty="0"/>
+          </a:p>
+          <a:p>
+            <a:pPr marL="285750" indent="-285750">
+              <a:buFontTx/>
+              <a:buChar char="-"/>
+            </a:pPr>
+            <a:r>
+              <a:rPr lang="pl-PL" b="1" dirty="0"/>
+              <a:t>Poziom analizy przestrzennej: </a:t>
+            </a:r>
+            <a:r>
+              <a:rPr lang="pl-PL" dirty="0"/>
+              <a:t>Analiza przeprowadzona na poziomie krajowym z uwzględnieniem danych PISA oraz komponentu przestrzennego</a:t>
+            </a:r>
+          </a:p>
+        </p:txBody>
+      </p:sp>
+      <p:sp>
+        <p:nvSpPr>
+          <p:cNvPr id="24" name="pole tekstowe 23">
+            <a:extLst>
+              <a:ext uri="{FF2B5EF4-FFF2-40B4-BE49-F238E27FC236}">
+                <a16:creationId xmlns:a16="http://schemas.microsoft.com/office/drawing/2014/main" id="{EF75B657-1EFC-8AB8-EE72-2C875EEC6B09}"/>
+              </a:ext>
+            </a:extLst>
+          </p:cNvPr>
+          <p:cNvSpPr txBox="1"/>
+          <p:nvPr/>
+        </p:nvSpPr>
+        <p:spPr>
+          <a:xfrm>
+            <a:off x="7005234" y="5600771"/>
+            <a:ext cx="4777743" cy="276999"/>
+          </a:xfrm>
+          <a:prstGeom prst="rect">
+            <a:avLst/>
+          </a:prstGeom>
+          <a:noFill/>
+        </p:spPr>
+        <p:txBody>
+          <a:bodyPr wrap="square" rtlCol="0">
+            <a:spAutoFit/>
+          </a:bodyPr>
+          <a:lstStyle/>
+          <a:p>
+            <a:pPr algn="r"/>
+            <a:r>
+              <a:rPr lang="pl-PL" sz="1200" dirty="0">
+                <a:hlinkClick r:id="rId2"/>
+              </a:rPr>
+              <a:t>John </a:t>
+            </a:r>
+            <a:r>
+              <a:rPr lang="pl-PL" sz="1200" dirty="0" err="1">
+                <a:hlinkClick r:id="rId2"/>
+              </a:rPr>
+              <a:t>Cobb</a:t>
+            </a:r>
+            <a:r>
+              <a:rPr lang="pl-PL" sz="1200" dirty="0">
+                <a:hlinkClick r:id="rId2"/>
+              </a:rPr>
+              <a:t> - </a:t>
+            </a:r>
+            <a:r>
+              <a:rPr lang="pl-PL" sz="1200" dirty="0" err="1">
+                <a:hlinkClick r:id="rId2"/>
+              </a:rPr>
+              <a:t>Aerial</a:t>
+            </a:r>
+            <a:r>
+              <a:rPr lang="pl-PL" sz="1200" dirty="0">
+                <a:hlinkClick r:id="rId2"/>
+              </a:rPr>
+              <a:t> </a:t>
+            </a:r>
+            <a:r>
+              <a:rPr lang="pl-PL" sz="1200" dirty="0" err="1">
+                <a:hlinkClick r:id="rId2"/>
+              </a:rPr>
+              <a:t>Photography</a:t>
+            </a:r>
+            <a:r>
+              <a:rPr lang="pl-PL" sz="1200" dirty="0"/>
+              <a:t> </a:t>
+            </a:r>
+          </a:p>
+        </p:txBody>
+      </p:sp>
+      <p:pic>
+        <p:nvPicPr>
+          <p:cNvPr id="2050" name="Picture 2" descr="aerial photography of red roof houses at daytime">
+            <a:extLst>
+              <a:ext uri="{FF2B5EF4-FFF2-40B4-BE49-F238E27FC236}">
+                <a16:creationId xmlns:a16="http://schemas.microsoft.com/office/drawing/2014/main" id="{555E2A2E-92A8-2506-D67C-18AD310EDAF8}"/>
+              </a:ext>
+            </a:extLst>
+          </p:cNvPr>
+          <p:cNvPicPr>
+            <a:picLocks noChangeAspect="1" noChangeArrowheads="1"/>
+          </p:cNvPicPr>
+          <p:nvPr/>
+        </p:nvPicPr>
+        <p:blipFill>
+          <a:blip r:embed="rId3">
+            <a:extLst>
+              <a:ext uri="{28A0092B-C50C-407E-A947-70E740481C1C}">
+                <a14:useLocalDpi xmlns:a14="http://schemas.microsoft.com/office/drawing/2010/main" val="0"/>
+              </a:ext>
+            </a:extLst>
+          </a:blip>
+          <a:srcRect/>
+          <a:stretch>
+            <a:fillRect/>
+          </a:stretch>
+        </p:blipFill>
+        <p:spPr bwMode="auto">
+          <a:xfrm>
+            <a:off x="5990094" y="1738849"/>
+            <a:ext cx="5792883" cy="3861922"/>
+          </a:xfrm>
+          <a:prstGeom prst="rect">
+            <a:avLst/>
+          </a:prstGeom>
+          <a:ln>
+            <a:noFill/>
+          </a:ln>
+          <a:effectLst>
+            <a:softEdge rad="112500"/>
+          </a:effectLst>
+          <a:extLst>
+            <a:ext uri="{909E8E84-426E-40DD-AFC4-6F175D3DCCD1}">
+              <a14:hiddenFill xmlns:a14="http://schemas.microsoft.com/office/drawing/2010/main">
+                <a:solidFill>
+                  <a:srgbClr val="FFFFFF"/>
+                </a:solidFill>
+              </a14:hiddenFill>
+            </a:ext>
+          </a:extLst>
+        </p:spPr>
+      </p:pic>
+    </p:spTree>
+    <p:extLst>
+      <p:ext uri="{BB962C8B-B14F-4D97-AF65-F5344CB8AC3E}">
+        <p14:creationId xmlns:p14="http://schemas.microsoft.com/office/powerpoint/2010/main" val="2808643085"/>
+      </p:ext>
+    </p:extLst>
+  </p:cSld>
+  <p:clrMapOvr>
+    <a:masterClrMapping/>
+  </p:clrMapOvr>
+</p:sld>
+</file>
+
+<file path=ppt/slides/slide5.xml><?xml version="1.0" encoding="utf-8"?>
+<p:sld xmlns:a="http://schemas.openxmlformats.org/drawingml/2006/main" xmlns:r="http://schemas.openxmlformats.org/officeDocument/2006/relationships" xmlns:p="http://schemas.openxmlformats.org/presentationml/2006/main">
+  <p:cSld>
+    <p:spTree>
+      <p:nvGrpSpPr>
+        <p:cNvPr id="1" name=""/>
+        <p:cNvGrpSpPr/>
+        <p:nvPr/>
+      </p:nvGrpSpPr>
+      <p:grpSpPr>
+        <a:xfrm>
+          <a:off x="0" y="0"/>
+          <a:ext cx="0" cy="0"/>
+          <a:chOff x="0" y="0"/>
+          <a:chExt cx="0" cy="0"/>
+        </a:xfrm>
+      </p:grpSpPr>
+      <p:sp>
+        <p:nvSpPr>
+          <p:cNvPr id="3" name="Subtitle 2">
+            <a:extLst>
+              <a:ext uri="{FF2B5EF4-FFF2-40B4-BE49-F238E27FC236}">
+                <a16:creationId xmlns:a16="http://schemas.microsoft.com/office/drawing/2014/main" id="{35E3EA69-4E0E-41BD-8095-A124225A2647}"/>
+              </a:ext>
+              <a:ext uri="{C183D7F6-B498-43B3-948B-1728B52AA6E4}">
+                <adec:decorative xmlns:adec="http://schemas.microsoft.com/office/drawing/2017/decorative" val="0"/>
+              </a:ext>
+            </a:extLst>
+          </p:cNvPr>
+          <p:cNvSpPr>
+            <a:spLocks noGrp="1"/>
+          </p:cNvSpPr>
+          <p:nvPr>
+            <p:ph sz="quarter" idx="21"/>
+          </p:nvPr>
+        </p:nvSpPr>
+        <p:spPr>
+          <a:xfrm>
+            <a:off x="1075447" y="2370670"/>
+            <a:ext cx="1856232" cy="1664208"/>
+          </a:xfrm>
+        </p:spPr>
+        <p:txBody>
+          <a:bodyPr>
+            <a:normAutofit/>
+          </a:bodyPr>
+          <a:lstStyle/>
+          <a:p>
+            <a:pPr algn="l">
+              <a:buNone/>
+            </a:pPr>
+            <a:r>
+              <a:rPr lang="pl-PL" b="0" i="0" dirty="0">
+                <a:solidFill>
+                  <a:srgbClr val="222222"/>
+                </a:solidFill>
+                <a:effectLst/>
+                <a:latin typeface="Arial" panose="020B0604020202020204" pitchFamily="34" charset="0"/>
+              </a:rPr>
+              <a:t>Zaprojektowanie prezentacji w </a:t>
+            </a:r>
+            <a:r>
+              <a:rPr lang="pl-PL" b="0" i="0" dirty="0" err="1">
+                <a:solidFill>
+                  <a:srgbClr val="222222"/>
+                </a:solidFill>
+                <a:effectLst/>
+                <a:latin typeface="Arial" panose="020B0604020202020204" pitchFamily="34" charset="0"/>
+              </a:rPr>
+              <a:t>powerpoint</a:t>
+            </a:r>
+            <a:r>
+              <a:rPr lang="pl-PL" b="0" i="0" dirty="0">
+                <a:solidFill>
+                  <a:srgbClr val="222222"/>
+                </a:solidFill>
+                <a:effectLst/>
+                <a:latin typeface="Arial" panose="020B0604020202020204" pitchFamily="34" charset="0"/>
+              </a:rPr>
+              <a:t> - dodanie punktu 2,3,4,5 (podpunkt </a:t>
+            </a:r>
+            <a:r>
+              <a:rPr lang="pl-PL" b="0" i="0" dirty="0" err="1">
+                <a:solidFill>
+                  <a:srgbClr val="222222"/>
+                </a:solidFill>
+                <a:effectLst/>
+                <a:latin typeface="Arial" panose="020B0604020202020204" pitchFamily="34" charset="0"/>
+              </a:rPr>
+              <a:t>a,b</a:t>
+            </a:r>
+            <a:r>
+              <a:rPr lang="pl-PL" b="0" i="0" dirty="0">
+                <a:solidFill>
+                  <a:srgbClr val="222222"/>
+                </a:solidFill>
+                <a:effectLst/>
+                <a:latin typeface="Arial" panose="020B0604020202020204" pitchFamily="34" charset="0"/>
+              </a:rPr>
+              <a:t>)</a:t>
+            </a:r>
+          </a:p>
+          <a:p>
+            <a:pPr algn="l"/>
+            <a:r>
+              <a:rPr lang="pl-PL" b="0" i="0" dirty="0">
+                <a:solidFill>
+                  <a:srgbClr val="666666"/>
+                </a:solidFill>
+                <a:effectLst/>
+                <a:latin typeface="Arial" panose="020B0604020202020204" pitchFamily="34" charset="0"/>
+              </a:rPr>
+              <a:t>—</a:t>
+            </a:r>
+          </a:p>
+        </p:txBody>
+      </p:sp>
+      <p:sp>
+        <p:nvSpPr>
+          <p:cNvPr id="12" name="Text Placeholder 3">
+            <a:extLst>
+              <a:ext uri="{FF2B5EF4-FFF2-40B4-BE49-F238E27FC236}">
+                <a16:creationId xmlns:a16="http://schemas.microsoft.com/office/drawing/2014/main" id="{52754FA1-2477-8F27-DF3F-88ACDF9CD510}"/>
+              </a:ext>
+            </a:extLst>
+          </p:cNvPr>
+          <p:cNvSpPr>
+            <a:spLocks noGrp="1"/>
+          </p:cNvSpPr>
+          <p:nvPr>
+            <p:ph type="body" idx="1"/>
+          </p:nvPr>
+        </p:nvSpPr>
+        <p:spPr>
+          <a:xfrm>
+            <a:off x="838200" y="3788813"/>
+            <a:ext cx="2330726" cy="804859"/>
+          </a:xfrm>
+        </p:spPr>
+        <p:txBody>
+          <a:bodyPr/>
+          <a:lstStyle/>
+          <a:p>
+            <a:endParaRPr lang="en-US"/>
+          </a:p>
+        </p:txBody>
+      </p:sp>
+      <p:sp>
+        <p:nvSpPr>
+          <p:cNvPr id="14" name="Text Placeholder 4">
+            <a:extLst>
+              <a:ext uri="{FF2B5EF4-FFF2-40B4-BE49-F238E27FC236}">
+                <a16:creationId xmlns:a16="http://schemas.microsoft.com/office/drawing/2014/main" id="{B08A1C6A-582D-9D79-7DF5-BBD59C5BAAE0}"/>
+              </a:ext>
+            </a:extLst>
+          </p:cNvPr>
+          <p:cNvSpPr>
+            <a:spLocks noGrp="1"/>
+          </p:cNvSpPr>
+          <p:nvPr>
+            <p:ph type="body" idx="17"/>
+          </p:nvPr>
+        </p:nvSpPr>
+        <p:spPr>
+          <a:xfrm>
+            <a:off x="838200" y="4464810"/>
+            <a:ext cx="2330726" cy="438505"/>
+          </a:xfrm>
+        </p:spPr>
+        <p:txBody>
+          <a:bodyPr/>
+          <a:lstStyle/>
+          <a:p>
+            <a:endParaRPr lang="en-US"/>
+          </a:p>
+        </p:txBody>
+      </p:sp>
+      <p:pic>
+        <p:nvPicPr>
+          <p:cNvPr id="18" name="Content Placeholder 17" descr="A graph with purple bars&#10;&#10;AI-generated content may be incorrect.">
+            <a:extLst>
+              <a:ext uri="{FF2B5EF4-FFF2-40B4-BE49-F238E27FC236}">
+                <a16:creationId xmlns:a16="http://schemas.microsoft.com/office/drawing/2014/main" id="{5C5B3E88-8731-C354-E01A-3BB4C000CF57}"/>
+              </a:ext>
+            </a:extLst>
+          </p:cNvPr>
+          <p:cNvPicPr>
+            <a:picLocks noGrp="1" noChangeAspect="1"/>
+          </p:cNvPicPr>
+          <p:nvPr>
+            <p:ph sz="half" idx="2"/>
+          </p:nvPr>
+        </p:nvPicPr>
+        <p:blipFill>
+          <a:blip r:embed="rId2"/>
+          <a:stretch>
+            <a:fillRect/>
+          </a:stretch>
+        </p:blipFill>
+        <p:spPr>
+          <a:xfrm>
+            <a:off x="3891948" y="1279261"/>
+            <a:ext cx="6966744" cy="4299477"/>
+          </a:xfrm>
+        </p:spPr>
+      </p:pic>
+    </p:spTree>
+    <p:extLst>
+      <p:ext uri="{BB962C8B-B14F-4D97-AF65-F5344CB8AC3E}">
+        <p14:creationId xmlns:p14="http://schemas.microsoft.com/office/powerpoint/2010/main" val="2243494996"/>
+      </p:ext>
+    </p:extLst>
+  </p:cSld>
+  <p:clrMapOvr>
+    <a:masterClrMapping/>
+  </p:clrMapOvr>
+</p:sld>
+</file>
+
+<file path=ppt/slides/slide6.xml><?xml version="1.0" encoding="utf-8"?>
+<p:sld xmlns:a="http://schemas.openxmlformats.org/drawingml/2006/main" xmlns:r="http://schemas.openxmlformats.org/officeDocument/2006/relationships" xmlns:p="http://schemas.openxmlformats.org/presentationml/2006/main">
+  <p:cSld>
+    <p:spTree>
+      <p:nvGrpSpPr>
+        <p:cNvPr id="1" name=""/>
+        <p:cNvGrpSpPr/>
+        <p:nvPr/>
+      </p:nvGrpSpPr>
+      <p:grpSpPr>
+        <a:xfrm>
+          <a:off x="0" y="0"/>
+          <a:ext cx="0" cy="0"/>
+          <a:chOff x="0" y="0"/>
+          <a:chExt cx="0" cy="0"/>
+        </a:xfrm>
+      </p:grpSpPr>
+      <p:sp>
+        <p:nvSpPr>
           <p:cNvPr id="38" name="Title 1">
             <a:extLst>
               <a:ext uri="{FF2B5EF4-FFF2-40B4-BE49-F238E27FC236}">
@@ -18240,7 +20077,7 @@
                   <a:spcPts val="600"/>
                 </a:spcAft>
               </a:pPr>
-              <a:t>3</a:t>
+              <a:t>6</a:t>
             </a:fld>
             <a:endParaRPr lang="en-US"/>
           </a:p>
@@ -18290,7 +20127,7 @@
 </p:sld>
 </file>
 
-<file path=ppt/slides/slide4.xml><?xml version="1.0" encoding="utf-8"?>
+<file path=ppt/slides/slide7.xml><?xml version="1.0" encoding="utf-8"?>
 <p:sld xmlns:a="http://schemas.openxmlformats.org/drawingml/2006/main" xmlns:r="http://schemas.openxmlformats.org/officeDocument/2006/relationships" xmlns:p="http://schemas.openxmlformats.org/presentationml/2006/main">
   <p:cSld>
     <p:spTree>
@@ -18389,7 +20226,7 @@
 </p:sld>
 </file>
 
-<file path=ppt/slides/slide5.xml><?xml version="1.0" encoding="utf-8"?>
+<file path=ppt/slides/slide8.xml><?xml version="1.0" encoding="utf-8"?>
 <p:sld xmlns:a="http://schemas.openxmlformats.org/drawingml/2006/main" xmlns:r="http://schemas.openxmlformats.org/officeDocument/2006/relationships" xmlns:p="http://schemas.openxmlformats.org/presentationml/2006/main">
   <p:cSld>
     <p:spTree>
@@ -18488,7 +20325,7 @@
 </p:sld>
 </file>
 
-<file path=ppt/slides/slide6.xml><?xml version="1.0" encoding="utf-8"?>
+<file path=ppt/slides/slide9.xml><?xml version="1.0" encoding="utf-8"?>
 <p:sld xmlns:a="http://schemas.openxmlformats.org/drawingml/2006/main" xmlns:r="http://schemas.openxmlformats.org/officeDocument/2006/relationships" xmlns:p="http://schemas.openxmlformats.org/presentationml/2006/main">
   <p:cSld>
     <p:spTree>
@@ -18578,889 +20415,6 @@
     <p:extLst>
       <p:ext uri="{BB962C8B-B14F-4D97-AF65-F5344CB8AC3E}">
         <p14:creationId xmlns:p14="http://schemas.microsoft.com/office/powerpoint/2010/main" val="214920404"/>
-      </p:ext>
-    </p:extLst>
-  </p:cSld>
-  <p:clrMapOvr>
-    <a:masterClrMapping/>
-  </p:clrMapOvr>
-</p:sld>
-</file>
-
-<file path=ppt/slides/slide7.xml><?xml version="1.0" encoding="utf-8"?>
-<p:sld xmlns:a="http://schemas.openxmlformats.org/drawingml/2006/main" xmlns:r="http://schemas.openxmlformats.org/officeDocument/2006/relationships" xmlns:p="http://schemas.openxmlformats.org/presentationml/2006/main">
-  <p:cSld>
-    <p:spTree>
-      <p:nvGrpSpPr>
-        <p:cNvPr id="1" name="">
-          <a:extLst>
-            <a:ext uri="{FF2B5EF4-FFF2-40B4-BE49-F238E27FC236}">
-              <a16:creationId xmlns:a16="http://schemas.microsoft.com/office/drawing/2014/main" id="{2532C971-BB57-606A-92DA-F29331ACB2B0}"/>
-            </a:ext>
-          </a:extLst>
-        </p:cNvPr>
-        <p:cNvGrpSpPr/>
-        <p:nvPr/>
-      </p:nvGrpSpPr>
-      <p:grpSpPr>
-        <a:xfrm>
-          <a:off x="0" y="0"/>
-          <a:ext cx="0" cy="0"/>
-          <a:chOff x="0" y="0"/>
-          <a:chExt cx="0" cy="0"/>
-        </a:xfrm>
-      </p:grpSpPr>
-      <p:sp>
-        <p:nvSpPr>
-          <p:cNvPr id="2" name="Title 1">
-            <a:extLst>
-              <a:ext uri="{FF2B5EF4-FFF2-40B4-BE49-F238E27FC236}">
-                <a16:creationId xmlns:a16="http://schemas.microsoft.com/office/drawing/2014/main" id="{D1040F5B-CCC3-A940-6D81-F98B6477A801}"/>
-              </a:ext>
-            </a:extLst>
-          </p:cNvPr>
-          <p:cNvSpPr>
-            <a:spLocks noGrp="1"/>
-          </p:cNvSpPr>
-          <p:nvPr>
-            <p:ph type="title"/>
-          </p:nvPr>
-        </p:nvSpPr>
-        <p:spPr>
-          <a:xfrm>
-            <a:off x="1508760" y="4156405"/>
-            <a:ext cx="3139440" cy="1325563"/>
-          </a:xfrm>
-        </p:spPr>
-        <p:txBody>
-          <a:bodyPr/>
-          <a:lstStyle/>
-          <a:p>
-            <a:r>
-              <a:rPr lang="en-US" dirty="0"/>
-              <a:t>PRODUCT OVERVIEW</a:t>
-            </a:r>
-          </a:p>
-        </p:txBody>
-      </p:sp>
-      <p:pic>
-        <p:nvPicPr>
-          <p:cNvPr id="3" name="Picture 2">
-            <a:extLst>
-              <a:ext uri="{FF2B5EF4-FFF2-40B4-BE49-F238E27FC236}">
-                <a16:creationId xmlns:a16="http://schemas.microsoft.com/office/drawing/2014/main" id="{8DE00D5C-8E1B-3848-BBCA-909AF0A66EB3}"/>
-              </a:ext>
-            </a:extLst>
-          </p:cNvPr>
-          <p:cNvPicPr>
-            <a:picLocks noChangeAspect="1"/>
-          </p:cNvPicPr>
-          <p:nvPr/>
-        </p:nvPicPr>
-        <p:blipFill>
-          <a:blip r:embed="rId2"/>
-          <a:stretch>
-            <a:fillRect/>
-          </a:stretch>
-        </p:blipFill>
-        <p:spPr>
-          <a:xfrm>
-            <a:off x="5524500" y="943582"/>
-            <a:ext cx="6667500" cy="4114800"/>
-          </a:xfrm>
-          <a:prstGeom prst="rect">
-            <a:avLst/>
-          </a:prstGeom>
-        </p:spPr>
-      </p:pic>
-    </p:spTree>
-    <p:extLst>
-      <p:ext uri="{BB962C8B-B14F-4D97-AF65-F5344CB8AC3E}">
-        <p14:creationId xmlns:p14="http://schemas.microsoft.com/office/powerpoint/2010/main" val="627703921"/>
-      </p:ext>
-    </p:extLst>
-  </p:cSld>
-  <p:clrMapOvr>
-    <a:masterClrMapping/>
-  </p:clrMapOvr>
-</p:sld>
-</file>
-
-<file path=ppt/slides/slide8.xml><?xml version="1.0" encoding="utf-8"?>
-<p:sld xmlns:a="http://schemas.openxmlformats.org/drawingml/2006/main" xmlns:r="http://schemas.openxmlformats.org/officeDocument/2006/relationships" xmlns:p="http://schemas.openxmlformats.org/presentationml/2006/main">
-  <p:cSld>
-    <p:spTree>
-      <p:nvGrpSpPr>
-        <p:cNvPr id="1" name=""/>
-        <p:cNvGrpSpPr/>
-        <p:nvPr/>
-      </p:nvGrpSpPr>
-      <p:grpSpPr>
-        <a:xfrm>
-          <a:off x="0" y="0"/>
-          <a:ext cx="0" cy="0"/>
-          <a:chOff x="0" y="0"/>
-          <a:chExt cx="0" cy="0"/>
-        </a:xfrm>
-      </p:grpSpPr>
-      <p:sp>
-        <p:nvSpPr>
-          <p:cNvPr id="2" name="Title 1">
-            <a:extLst>
-              <a:ext uri="{FF2B5EF4-FFF2-40B4-BE49-F238E27FC236}">
-                <a16:creationId xmlns:a16="http://schemas.microsoft.com/office/drawing/2014/main" id="{8A4E0A63-A388-49B1-A04E-27CE9BD622EF}"/>
-              </a:ext>
-            </a:extLst>
-          </p:cNvPr>
-          <p:cNvSpPr>
-            <a:spLocks noGrp="1"/>
-          </p:cNvSpPr>
-          <p:nvPr>
-            <p:ph type="title"/>
-          </p:nvPr>
-        </p:nvSpPr>
-        <p:spPr>
-          <a:xfrm>
-            <a:off x="5920169" y="1152771"/>
-            <a:ext cx="5431971" cy="846301"/>
-          </a:xfrm>
-        </p:spPr>
-        <p:txBody>
-          <a:bodyPr/>
-          <a:lstStyle/>
-          <a:p>
-            <a:r>
-              <a:rPr lang="en-US" dirty="0"/>
-              <a:t>BUSINESS MODEL</a:t>
-            </a:r>
-          </a:p>
-        </p:txBody>
-      </p:sp>
-      <p:sp>
-        <p:nvSpPr>
-          <p:cNvPr id="6" name="Text Placeholder 5">
-            <a:extLst>
-              <a:ext uri="{FF2B5EF4-FFF2-40B4-BE49-F238E27FC236}">
-                <a16:creationId xmlns:a16="http://schemas.microsoft.com/office/drawing/2014/main" id="{7640DF9D-0C9E-4C5D-9635-6B4DE10CCEE5}"/>
-              </a:ext>
-            </a:extLst>
-          </p:cNvPr>
-          <p:cNvSpPr>
-            <a:spLocks noGrp="1"/>
-          </p:cNvSpPr>
-          <p:nvPr>
-            <p:ph type="body" sz="quarter" idx="13"/>
-          </p:nvPr>
-        </p:nvSpPr>
-        <p:spPr>
-          <a:xfrm>
-            <a:off x="5922254" y="2469515"/>
-            <a:ext cx="5433204" cy="365125"/>
-          </a:xfrm>
-        </p:spPr>
-        <p:txBody>
-          <a:bodyPr vert="horz" lIns="91440" tIns="45720" rIns="91440" bIns="45720" rtlCol="0" anchor="t">
-            <a:noAutofit/>
-          </a:bodyPr>
-          <a:lstStyle/>
-          <a:p>
-            <a:r>
-              <a:rPr lang="en-US" noProof="1"/>
-              <a:t>ABSTRACT</a:t>
-            </a:r>
-          </a:p>
-        </p:txBody>
-      </p:sp>
-      <p:sp>
-        <p:nvSpPr>
-          <p:cNvPr id="7" name="Text Placeholder 6">
-            <a:extLst>
-              <a:ext uri="{FF2B5EF4-FFF2-40B4-BE49-F238E27FC236}">
-                <a16:creationId xmlns:a16="http://schemas.microsoft.com/office/drawing/2014/main" id="{40297407-CE4E-4284-879D-AEC395713625}"/>
-              </a:ext>
-            </a:extLst>
-          </p:cNvPr>
-          <p:cNvSpPr>
-            <a:spLocks noGrp="1"/>
-          </p:cNvSpPr>
-          <p:nvPr>
-            <p:ph type="body" sz="quarter" idx="15"/>
-          </p:nvPr>
-        </p:nvSpPr>
-        <p:spPr>
-          <a:xfrm>
-            <a:off x="5921828" y="2798940"/>
-            <a:ext cx="5431971" cy="557950"/>
-          </a:xfrm>
-        </p:spPr>
-        <p:txBody>
-          <a:bodyPr>
-            <a:normAutofit/>
-          </a:bodyPr>
-          <a:lstStyle/>
-          <a:p>
-            <a:r>
-              <a:rPr lang="en-US" noProof="1"/>
-              <a:t>We based our research on market trends and social media</a:t>
-            </a:r>
-          </a:p>
-        </p:txBody>
-      </p:sp>
-      <p:sp>
-        <p:nvSpPr>
-          <p:cNvPr id="8" name="Text Placeholder 7">
-            <a:extLst>
-              <a:ext uri="{FF2B5EF4-FFF2-40B4-BE49-F238E27FC236}">
-                <a16:creationId xmlns:a16="http://schemas.microsoft.com/office/drawing/2014/main" id="{F5C3A7BE-F7FC-4942-A31A-491A8A806103}"/>
-              </a:ext>
-            </a:extLst>
-          </p:cNvPr>
-          <p:cNvSpPr>
-            <a:spLocks noGrp="1"/>
-          </p:cNvSpPr>
-          <p:nvPr>
-            <p:ph type="body" sz="quarter" idx="23"/>
-          </p:nvPr>
-        </p:nvSpPr>
-        <p:spPr>
-          <a:xfrm>
-            <a:off x="5922254" y="3569311"/>
-            <a:ext cx="5433204" cy="365125"/>
-          </a:xfrm>
-        </p:spPr>
-        <p:txBody>
-          <a:bodyPr vert="horz" lIns="91440" tIns="45720" rIns="91440" bIns="45720" rtlCol="0" anchor="t">
-            <a:noAutofit/>
-          </a:bodyPr>
-          <a:lstStyle/>
-          <a:p>
-            <a:r>
-              <a:rPr lang="en-US" noProof="1"/>
-              <a:t>DESIGN</a:t>
-            </a:r>
-          </a:p>
-        </p:txBody>
-      </p:sp>
-      <p:sp>
-        <p:nvSpPr>
-          <p:cNvPr id="9" name="Text Placeholder 8">
-            <a:extLst>
-              <a:ext uri="{FF2B5EF4-FFF2-40B4-BE49-F238E27FC236}">
-                <a16:creationId xmlns:a16="http://schemas.microsoft.com/office/drawing/2014/main" id="{95CCE699-03D1-4642-B46A-B14EF17DA183}"/>
-              </a:ext>
-            </a:extLst>
-          </p:cNvPr>
-          <p:cNvSpPr>
-            <a:spLocks noGrp="1"/>
-          </p:cNvSpPr>
-          <p:nvPr>
-            <p:ph type="body" sz="quarter" idx="24"/>
-          </p:nvPr>
-        </p:nvSpPr>
-        <p:spPr>
-          <a:xfrm>
-            <a:off x="5921828" y="3898736"/>
-            <a:ext cx="5431971" cy="557950"/>
-          </a:xfrm>
-        </p:spPr>
-        <p:txBody>
-          <a:bodyPr>
-            <a:normAutofit/>
-          </a:bodyPr>
-          <a:lstStyle/>
-          <a:p>
-            <a:r>
-              <a:rPr lang="en-US" noProof="1"/>
-              <a:t>We believe people need more products specifically dedicated to this niche market</a:t>
-            </a:r>
-          </a:p>
-        </p:txBody>
-      </p:sp>
-      <p:sp>
-        <p:nvSpPr>
-          <p:cNvPr id="10" name="Text Placeholder 9">
-            <a:extLst>
-              <a:ext uri="{FF2B5EF4-FFF2-40B4-BE49-F238E27FC236}">
-                <a16:creationId xmlns:a16="http://schemas.microsoft.com/office/drawing/2014/main" id="{BC1DF189-6F2F-4C21-88CC-C82D3D0D147B}"/>
-              </a:ext>
-            </a:extLst>
-          </p:cNvPr>
-          <p:cNvSpPr>
-            <a:spLocks noGrp="1"/>
-          </p:cNvSpPr>
-          <p:nvPr>
-            <p:ph type="body" sz="quarter" idx="25"/>
-          </p:nvPr>
-        </p:nvSpPr>
-        <p:spPr>
-          <a:xfrm>
-            <a:off x="5922254" y="4669107"/>
-            <a:ext cx="5433204" cy="365125"/>
-          </a:xfrm>
-        </p:spPr>
-        <p:txBody>
-          <a:bodyPr vert="horz" lIns="91440" tIns="45720" rIns="91440" bIns="45720" rtlCol="0" anchor="t">
-            <a:normAutofit lnSpcReduction="10000"/>
-          </a:bodyPr>
-          <a:lstStyle/>
-          <a:p>
-            <a:r>
-              <a:rPr lang="en-US" noProof="1"/>
-              <a:t>RESEARCH</a:t>
-            </a:r>
-          </a:p>
-        </p:txBody>
-      </p:sp>
-      <p:sp>
-        <p:nvSpPr>
-          <p:cNvPr id="5" name="Text Placeholder 4">
-            <a:extLst>
-              <a:ext uri="{FF2B5EF4-FFF2-40B4-BE49-F238E27FC236}">
-                <a16:creationId xmlns:a16="http://schemas.microsoft.com/office/drawing/2014/main" id="{06E82690-B145-4D4F-B2D1-0B2A8C50FD71}"/>
-              </a:ext>
-            </a:extLst>
-          </p:cNvPr>
-          <p:cNvSpPr>
-            <a:spLocks noGrp="1"/>
-          </p:cNvSpPr>
-          <p:nvPr>
-            <p:ph type="body" sz="quarter" idx="26"/>
-          </p:nvPr>
-        </p:nvSpPr>
-        <p:spPr>
-          <a:xfrm>
-            <a:off x="5921828" y="4998532"/>
-            <a:ext cx="5431971" cy="557950"/>
-          </a:xfrm>
-        </p:spPr>
-        <p:txBody>
-          <a:bodyPr>
-            <a:normAutofit/>
-          </a:bodyPr>
-          <a:lstStyle/>
-          <a:p>
-            <a:r>
-              <a:rPr lang="en-US" noProof="1"/>
-              <a:t>Minimalist and easy to use </a:t>
-            </a:r>
-          </a:p>
-        </p:txBody>
-      </p:sp>
-      <p:sp>
-        <p:nvSpPr>
-          <p:cNvPr id="32" name="Date Placeholder 31">
-            <a:extLst>
-              <a:ext uri="{FF2B5EF4-FFF2-40B4-BE49-F238E27FC236}">
-                <a16:creationId xmlns:a16="http://schemas.microsoft.com/office/drawing/2014/main" id="{D5DB19F8-B538-4965-BA90-ED372B99F5DC}"/>
-              </a:ext>
-            </a:extLst>
-          </p:cNvPr>
-          <p:cNvSpPr>
-            <a:spLocks noGrp="1"/>
-          </p:cNvSpPr>
-          <p:nvPr>
-            <p:ph type="dt" sz="half" idx="20"/>
-          </p:nvPr>
-        </p:nvSpPr>
-        <p:spPr>
-          <a:xfrm>
-            <a:off x="5919680" y="6356350"/>
-            <a:ext cx="947516" cy="365125"/>
-          </a:xfrm>
-        </p:spPr>
-        <p:txBody>
-          <a:bodyPr/>
-          <a:lstStyle/>
-          <a:p>
-            <a:r>
-              <a:rPr lang="en-US" dirty="0"/>
-              <a:t>20XX</a:t>
-            </a:r>
-          </a:p>
-        </p:txBody>
-      </p:sp>
-      <p:sp>
-        <p:nvSpPr>
-          <p:cNvPr id="3" name="Footer Placeholder 2">
-            <a:extLst>
-              <a:ext uri="{FF2B5EF4-FFF2-40B4-BE49-F238E27FC236}">
-                <a16:creationId xmlns:a16="http://schemas.microsoft.com/office/drawing/2014/main" id="{005C44B1-BA82-483C-BD91-F89067442F9E}"/>
-              </a:ext>
-            </a:extLst>
-          </p:cNvPr>
-          <p:cNvSpPr>
-            <a:spLocks noGrp="1"/>
-          </p:cNvSpPr>
-          <p:nvPr>
-            <p:ph type="ftr" sz="quarter" idx="21"/>
-          </p:nvPr>
-        </p:nvSpPr>
-        <p:spPr>
-          <a:xfrm>
-            <a:off x="7161955" y="6356350"/>
-            <a:ext cx="3243942" cy="365125"/>
-          </a:xfrm>
-        </p:spPr>
-        <p:txBody>
-          <a:bodyPr/>
-          <a:lstStyle/>
-          <a:p>
-            <a:r>
-              <a:rPr lang="en-US" dirty="0"/>
-              <a:t>Pitch Deck</a:t>
-            </a:r>
-          </a:p>
-        </p:txBody>
-      </p:sp>
-      <p:sp>
-        <p:nvSpPr>
-          <p:cNvPr id="4" name="Slide Number Placeholder 3">
-            <a:extLst>
-              <a:ext uri="{FF2B5EF4-FFF2-40B4-BE49-F238E27FC236}">
-                <a16:creationId xmlns:a16="http://schemas.microsoft.com/office/drawing/2014/main" id="{79ED4A67-3A46-4F54-A12A-EAE1B53E6457}"/>
-              </a:ext>
-            </a:extLst>
-          </p:cNvPr>
-          <p:cNvSpPr>
-            <a:spLocks noGrp="1"/>
-          </p:cNvSpPr>
-          <p:nvPr>
-            <p:ph type="sldNum" sz="quarter" idx="22"/>
-          </p:nvPr>
-        </p:nvSpPr>
-        <p:spPr>
-          <a:xfrm>
-            <a:off x="10700656" y="6356350"/>
-            <a:ext cx="653143" cy="365125"/>
-          </a:xfrm>
-        </p:spPr>
-        <p:txBody>
-          <a:bodyPr/>
-          <a:lstStyle/>
-          <a:p>
-            <a:fld id="{19B51A1E-902D-48AF-9020-955120F399B6}" type="slidenum">
-              <a:rPr lang="en-US" smtClean="0"/>
-              <a:pPr/>
-              <a:t>8</a:t>
-            </a:fld>
-            <a:endParaRPr lang="en-US" dirty="0"/>
-          </a:p>
-        </p:txBody>
-      </p:sp>
-    </p:spTree>
-    <p:extLst>
-      <p:ext uri="{BB962C8B-B14F-4D97-AF65-F5344CB8AC3E}">
-        <p14:creationId xmlns:p14="http://schemas.microsoft.com/office/powerpoint/2010/main" val="2069393026"/>
-      </p:ext>
-    </p:extLst>
-  </p:cSld>
-  <p:clrMapOvr>
-    <a:masterClrMapping/>
-  </p:clrMapOvr>
-</p:sld>
-</file>
-
-<file path=ppt/slides/slide9.xml><?xml version="1.0" encoding="utf-8"?>
-<p:sld xmlns:a="http://schemas.openxmlformats.org/drawingml/2006/main" xmlns:r="http://schemas.openxmlformats.org/officeDocument/2006/relationships" xmlns:p="http://schemas.openxmlformats.org/presentationml/2006/main">
-  <p:cSld>
-    <p:spTree>
-      <p:nvGrpSpPr>
-        <p:cNvPr id="1" name=""/>
-        <p:cNvGrpSpPr/>
-        <p:nvPr/>
-      </p:nvGrpSpPr>
-      <p:grpSpPr>
-        <a:xfrm>
-          <a:off x="0" y="0"/>
-          <a:ext cx="0" cy="0"/>
-          <a:chOff x="0" y="0"/>
-          <a:chExt cx="0" cy="0"/>
-        </a:xfrm>
-      </p:grpSpPr>
-      <p:sp>
-        <p:nvSpPr>
-          <p:cNvPr id="2" name="Title 1">
-            <a:extLst>
-              <a:ext uri="{FF2B5EF4-FFF2-40B4-BE49-F238E27FC236}">
-                <a16:creationId xmlns:a16="http://schemas.microsoft.com/office/drawing/2014/main" id="{5CE54ABB-4929-4810-950B-2DAEA0A5BAB4}"/>
-              </a:ext>
-            </a:extLst>
-          </p:cNvPr>
-          <p:cNvSpPr>
-            <a:spLocks noGrp="1"/>
-          </p:cNvSpPr>
-          <p:nvPr>
-            <p:ph type="title"/>
-          </p:nvPr>
-        </p:nvSpPr>
-        <p:spPr>
-          <a:xfrm>
-            <a:off x="1885156" y="892177"/>
-            <a:ext cx="8421688" cy="1325563"/>
-          </a:xfrm>
-        </p:spPr>
-        <p:txBody>
-          <a:bodyPr/>
-          <a:lstStyle/>
-          <a:p>
-            <a:r>
-              <a:rPr lang="en-US" dirty="0"/>
-              <a:t>MARKET OVERVIEW</a:t>
-            </a:r>
-          </a:p>
-        </p:txBody>
-      </p:sp>
-      <p:sp>
-        <p:nvSpPr>
-          <p:cNvPr id="4" name="Text Placeholder 3">
-            <a:extLst>
-              <a:ext uri="{FF2B5EF4-FFF2-40B4-BE49-F238E27FC236}">
-                <a16:creationId xmlns:a16="http://schemas.microsoft.com/office/drawing/2014/main" id="{A112B089-A8F9-45B1-BE6E-EAC10163F082}"/>
-              </a:ext>
-            </a:extLst>
-          </p:cNvPr>
-          <p:cNvSpPr>
-            <a:spLocks noGrp="1"/>
-          </p:cNvSpPr>
-          <p:nvPr>
-            <p:ph type="body" idx="1"/>
-          </p:nvPr>
-        </p:nvSpPr>
-        <p:spPr>
-          <a:xfrm>
-            <a:off x="1243104" y="2776936"/>
-            <a:ext cx="2882475" cy="823912"/>
-          </a:xfrm>
-        </p:spPr>
-        <p:txBody>
-          <a:bodyPr/>
-          <a:lstStyle/>
-          <a:p>
-            <a:r>
-              <a:rPr lang="en-US" dirty="0"/>
-              <a:t>$3 Billion</a:t>
-            </a:r>
-          </a:p>
-        </p:txBody>
-      </p:sp>
-      <p:sp>
-        <p:nvSpPr>
-          <p:cNvPr id="7" name="Content Placeholder 6">
-            <a:extLst>
-              <a:ext uri="{FF2B5EF4-FFF2-40B4-BE49-F238E27FC236}">
-                <a16:creationId xmlns:a16="http://schemas.microsoft.com/office/drawing/2014/main" id="{6B35F89A-6CDF-41F7-BD87-18B45BD7330B}"/>
-              </a:ext>
-            </a:extLst>
-          </p:cNvPr>
-          <p:cNvSpPr>
-            <a:spLocks noGrp="1"/>
-          </p:cNvSpPr>
-          <p:nvPr>
-            <p:ph sz="half" idx="2"/>
-          </p:nvPr>
-        </p:nvSpPr>
-        <p:spPr>
-          <a:xfrm>
-            <a:off x="1243104" y="3834606"/>
-            <a:ext cx="2882475" cy="1997867"/>
-          </a:xfrm>
-        </p:spPr>
-        <p:txBody>
-          <a:bodyPr vert="horz" lIns="91440" tIns="45720" rIns="91440" bIns="45720" rtlCol="0" anchor="t">
-            <a:normAutofit/>
-          </a:bodyPr>
-          <a:lstStyle/>
-          <a:p>
-            <a:r>
-              <a:rPr lang="en-US" noProof="1"/>
-              <a:t>Freedom to invent</a:t>
-            </a:r>
-            <a:endParaRPr lang="en-US" dirty="0"/>
-          </a:p>
-          <a:p>
-            <a:r>
-              <a:rPr lang="en-US" noProof="1"/>
-              <a:t>Selectively inclusive market</a:t>
-            </a:r>
-          </a:p>
-          <a:p>
-            <a:r>
-              <a:rPr lang="en-US" noProof="1"/>
-              <a:t>Serviceable available market</a:t>
-            </a:r>
-          </a:p>
-          <a:p>
-            <a:endParaRPr lang="en-US" noProof="1"/>
-          </a:p>
-        </p:txBody>
-      </p:sp>
-      <p:sp>
-        <p:nvSpPr>
-          <p:cNvPr id="6" name="Text Placeholder 5">
-            <a:extLst>
-              <a:ext uri="{FF2B5EF4-FFF2-40B4-BE49-F238E27FC236}">
-                <a16:creationId xmlns:a16="http://schemas.microsoft.com/office/drawing/2014/main" id="{0FE22F9B-4BF8-41DC-8F1C-836B546E59AD}"/>
-              </a:ext>
-            </a:extLst>
-          </p:cNvPr>
-          <p:cNvSpPr>
-            <a:spLocks noGrp="1"/>
-          </p:cNvSpPr>
-          <p:nvPr>
-            <p:ph type="body" sz="quarter" idx="3"/>
-          </p:nvPr>
-        </p:nvSpPr>
-        <p:spPr>
-          <a:xfrm>
-            <a:off x="4647665" y="2776936"/>
-            <a:ext cx="2896671" cy="823912"/>
-          </a:xfrm>
-        </p:spPr>
-        <p:txBody>
-          <a:bodyPr/>
-          <a:lstStyle/>
-          <a:p>
-            <a:r>
-              <a:rPr lang="en-US" dirty="0"/>
-              <a:t>$1 Billion</a:t>
-            </a:r>
-          </a:p>
-        </p:txBody>
-      </p:sp>
-      <p:sp>
-        <p:nvSpPr>
-          <p:cNvPr id="3" name="Text Placeholder 2">
-            <a:extLst>
-              <a:ext uri="{FF2B5EF4-FFF2-40B4-BE49-F238E27FC236}">
-                <a16:creationId xmlns:a16="http://schemas.microsoft.com/office/drawing/2014/main" id="{D5E1C399-8F48-44F5-9461-3C89866D4CE1}"/>
-              </a:ext>
-            </a:extLst>
-          </p:cNvPr>
-          <p:cNvSpPr>
-            <a:spLocks noGrp="1"/>
-          </p:cNvSpPr>
-          <p:nvPr>
-            <p:ph sz="quarter" idx="4"/>
-          </p:nvPr>
-        </p:nvSpPr>
-        <p:spPr>
-          <a:xfrm>
-            <a:off x="4647665" y="3834606"/>
-            <a:ext cx="2896671" cy="1997867"/>
-          </a:xfrm>
-        </p:spPr>
-        <p:txBody>
-          <a:bodyPr/>
-          <a:lstStyle/>
-          <a:p>
-            <a:r>
-              <a:rPr lang="en-US" dirty="0"/>
-              <a:t>Opportunity to build</a:t>
-            </a:r>
-          </a:p>
-          <a:p>
-            <a:r>
-              <a:rPr lang="en-US" dirty="0"/>
-              <a:t>Fully inclusive market</a:t>
-            </a:r>
-          </a:p>
-          <a:p>
-            <a:r>
-              <a:rPr lang="en-US" dirty="0"/>
-              <a:t>Total addressable market</a:t>
-            </a:r>
-          </a:p>
-        </p:txBody>
-      </p:sp>
-      <p:sp>
-        <p:nvSpPr>
-          <p:cNvPr id="5" name="Content Placeholder 4">
-            <a:extLst>
-              <a:ext uri="{FF2B5EF4-FFF2-40B4-BE49-F238E27FC236}">
-                <a16:creationId xmlns:a16="http://schemas.microsoft.com/office/drawing/2014/main" id="{CF515C5D-2CDB-4E66-B2B8-1451BC44247F}"/>
-              </a:ext>
-            </a:extLst>
-          </p:cNvPr>
-          <p:cNvSpPr>
-            <a:spLocks noGrp="1"/>
-          </p:cNvSpPr>
-          <p:nvPr>
-            <p:ph type="body" idx="13"/>
-          </p:nvPr>
-        </p:nvSpPr>
-        <p:spPr>
-          <a:xfrm>
-            <a:off x="8066421" y="2776936"/>
-            <a:ext cx="2882475" cy="823912"/>
-          </a:xfrm>
-        </p:spPr>
-        <p:txBody>
-          <a:bodyPr vert="horz" lIns="91440" tIns="45720" rIns="91440" bIns="45720" rtlCol="0" anchor="b">
-            <a:normAutofit/>
-          </a:bodyPr>
-          <a:lstStyle/>
-          <a:p>
-            <a:r>
-              <a:rPr lang="en-US" dirty="0"/>
-              <a:t>$2 Billion</a:t>
-            </a:r>
-          </a:p>
-        </p:txBody>
-      </p:sp>
-      <p:sp>
-        <p:nvSpPr>
-          <p:cNvPr id="8" name="Text Placeholder 7">
-            <a:extLst>
-              <a:ext uri="{FF2B5EF4-FFF2-40B4-BE49-F238E27FC236}">
-                <a16:creationId xmlns:a16="http://schemas.microsoft.com/office/drawing/2014/main" id="{E92B9716-8D44-4864-8986-720957B34362}"/>
-              </a:ext>
-            </a:extLst>
-          </p:cNvPr>
-          <p:cNvSpPr>
-            <a:spLocks noGrp="1"/>
-          </p:cNvSpPr>
-          <p:nvPr>
-            <p:ph sz="half" idx="14"/>
-          </p:nvPr>
-        </p:nvSpPr>
-        <p:spPr>
-          <a:xfrm>
-            <a:off x="8066421" y="3834606"/>
-            <a:ext cx="2882475" cy="1997867"/>
-          </a:xfrm>
-        </p:spPr>
-        <p:txBody>
-          <a:bodyPr/>
-          <a:lstStyle/>
-          <a:p>
-            <a:r>
-              <a:rPr lang="en-US" noProof="1"/>
-              <a:t>Few competitors</a:t>
-            </a:r>
-          </a:p>
-          <a:p>
-            <a:r>
-              <a:rPr lang="en-US" noProof="1"/>
-              <a:t>Specifically targeted market</a:t>
-            </a:r>
-          </a:p>
-          <a:p>
-            <a:r>
-              <a:rPr lang="en-US" noProof="1"/>
-              <a:t>Serviceable obtainable market</a:t>
-            </a:r>
-            <a:endParaRPr lang="en-US" dirty="0"/>
-          </a:p>
-          <a:p>
-            <a:endParaRPr lang="en-US" dirty="0"/>
-          </a:p>
-        </p:txBody>
-      </p:sp>
-      <p:sp>
-        <p:nvSpPr>
-          <p:cNvPr id="9" name="Date Placeholder 8">
-            <a:extLst>
-              <a:ext uri="{FF2B5EF4-FFF2-40B4-BE49-F238E27FC236}">
-                <a16:creationId xmlns:a16="http://schemas.microsoft.com/office/drawing/2014/main" id="{7B78F7A0-88C5-4940-B21C-099F472F39F9}"/>
-              </a:ext>
-            </a:extLst>
-          </p:cNvPr>
-          <p:cNvSpPr>
-            <a:spLocks noGrp="1"/>
-          </p:cNvSpPr>
-          <p:nvPr>
-            <p:ph type="dt" sz="half" idx="10"/>
-          </p:nvPr>
-        </p:nvSpPr>
-        <p:spPr>
-          <a:xfrm>
-            <a:off x="838200" y="6356350"/>
-            <a:ext cx="2743200" cy="365125"/>
-          </a:xfrm>
-        </p:spPr>
-        <p:txBody>
-          <a:bodyPr/>
-          <a:lstStyle/>
-          <a:p>
-            <a:r>
-              <a:rPr lang="en-US" dirty="0"/>
-              <a:t>20XX</a:t>
-            </a:r>
-          </a:p>
-        </p:txBody>
-      </p:sp>
-      <p:sp>
-        <p:nvSpPr>
-          <p:cNvPr id="10" name="Footer Placeholder 9">
-            <a:extLst>
-              <a:ext uri="{FF2B5EF4-FFF2-40B4-BE49-F238E27FC236}">
-                <a16:creationId xmlns:a16="http://schemas.microsoft.com/office/drawing/2014/main" id="{D2186069-FC8E-433D-9BB4-942220CE8CFB}"/>
-              </a:ext>
-            </a:extLst>
-          </p:cNvPr>
-          <p:cNvSpPr>
-            <a:spLocks noGrp="1"/>
-          </p:cNvSpPr>
-          <p:nvPr>
-            <p:ph type="ftr" sz="quarter" idx="11"/>
-          </p:nvPr>
-        </p:nvSpPr>
-        <p:spPr>
-          <a:xfrm>
-            <a:off x="4038600" y="6356350"/>
-            <a:ext cx="4114800" cy="365125"/>
-          </a:xfrm>
-        </p:spPr>
-        <p:txBody>
-          <a:bodyPr/>
-          <a:lstStyle/>
-          <a:p>
-            <a:r>
-              <a:rPr lang="en-US" dirty="0"/>
-              <a:t>Pitch Deck</a:t>
-            </a:r>
-          </a:p>
-        </p:txBody>
-      </p:sp>
-      <p:sp>
-        <p:nvSpPr>
-          <p:cNvPr id="11" name="Slide Number Placeholder 10">
-            <a:extLst>
-              <a:ext uri="{FF2B5EF4-FFF2-40B4-BE49-F238E27FC236}">
-                <a16:creationId xmlns:a16="http://schemas.microsoft.com/office/drawing/2014/main" id="{BAD5B6F4-0A90-447A-A1AE-D75C934B6B29}"/>
-              </a:ext>
-            </a:extLst>
-          </p:cNvPr>
-          <p:cNvSpPr>
-            <a:spLocks noGrp="1"/>
-          </p:cNvSpPr>
-          <p:nvPr>
-            <p:ph type="sldNum" sz="quarter" idx="12"/>
-          </p:nvPr>
-        </p:nvSpPr>
-        <p:spPr>
-          <a:xfrm>
-            <a:off x="8610600" y="6356350"/>
-            <a:ext cx="2743200" cy="365125"/>
-          </a:xfrm>
-        </p:spPr>
-        <p:txBody>
-          <a:bodyPr/>
-          <a:lstStyle/>
-          <a:p>
-            <a:fld id="{B5CEABB6-07DC-46E8-9B57-56EC44A396E5}" type="slidenum">
-              <a:rPr lang="en-US" smtClean="0"/>
-              <a:pPr/>
-              <a:t>9</a:t>
-            </a:fld>
-            <a:endParaRPr lang="en-US" dirty="0"/>
-          </a:p>
-        </p:txBody>
-      </p:sp>
-    </p:spTree>
-    <p:extLst>
-      <p:ext uri="{BB962C8B-B14F-4D97-AF65-F5344CB8AC3E}">
-        <p14:creationId xmlns:p14="http://schemas.microsoft.com/office/powerpoint/2010/main" val="2121178069"/>
       </p:ext>
     </p:extLst>
   </p:cSld>
@@ -20262,6 +21216,26 @@
 </file>
 
 <file path=customXml/item1.xml><?xml version="1.0" encoding="utf-8"?>
+<p:properties xmlns:p="http://schemas.microsoft.com/office/2006/metadata/properties" xmlns:xsi="http://www.w3.org/2001/XMLSchema-instance" xmlns:pc="http://schemas.microsoft.com/office/infopath/2007/PartnerControls">
+  <documentManagement>
+    <_ip_UnifiedCompliancePolicyUIAction xmlns="http://schemas.microsoft.com/sharepoint/v3" xsi:nil="true"/>
+    <Image xmlns="71af3243-3dd4-4a8d-8c0d-dd76da1f02a5">
+      <Url xsi:nil="true"/>
+      <Description xsi:nil="true"/>
+    </Image>
+    <Status xmlns="71af3243-3dd4-4a8d-8c0d-dd76da1f02a5">Not started</Status>
+    <Background xmlns="71af3243-3dd4-4a8d-8c0d-dd76da1f02a5">false</Background>
+    <_ip_UnifiedCompliancePolicyProperties xmlns="http://schemas.microsoft.com/sharepoint/v3" xsi:nil="true"/>
+    <ImageTagsTaxHTField xmlns="71af3243-3dd4-4a8d-8c0d-dd76da1f02a5">
+      <Terms xmlns="http://schemas.microsoft.com/office/infopath/2007/PartnerControls"/>
+    </ImageTagsTaxHTField>
+    <TaxCatchAll xmlns="230e9df3-be65-4c73-a93b-d1236ebd677e" xsi:nil="true"/>
+    <MediaServiceKeyPoints xmlns="71af3243-3dd4-4a8d-8c0d-dd76da1f02a5" xsi:nil="true"/>
+  </documentManagement>
+</p:properties>
+</file>
+
+<file path=customXml/item2.xml><?xml version="1.0" encoding="utf-8"?>
 <?mso-contentType ?>
 <FormTemplates xmlns="http://schemas.microsoft.com/sharepoint/v3/contenttype/forms">
   <Display>DocumentLibraryForm</Display>
@@ -20270,7 +21244,7 @@
 </FormTemplates>
 </file>
 
-<file path=customXml/item2.xml><?xml version="1.0" encoding="utf-8"?>
+<file path=customXml/item3.xml><?xml version="1.0" encoding="utf-8"?>
 <ct:contentTypeSchema xmlns:ct="http://schemas.microsoft.com/office/2006/metadata/contentType" xmlns:ma="http://schemas.microsoft.com/office/2006/metadata/properties/metaAttributes" ct:_="" ma:_="" ma:contentTypeName="Document" ma:contentTypeID="0x01010079F111ED35F8CC479449609E8A0923A6" ma:contentTypeVersion="27" ma:contentTypeDescription="Create a new document." ma:contentTypeScope="" ma:versionID="c6f9a84f66a9c8b9a21755b9ffafb945">
   <xsd:schema xmlns:xsd="http://www.w3.org/2001/XMLSchema" xmlns:xs="http://www.w3.org/2001/XMLSchema" xmlns:p="http://schemas.microsoft.com/office/2006/metadata/properties" xmlns:ns1="http://schemas.microsoft.com/sharepoint/v3" xmlns:ns2="71af3243-3dd4-4a8d-8c0d-dd76da1f02a5" xmlns:ns3="16c05727-aa75-4e4a-9b5f-8a80a1165891" xmlns:ns4="230e9df3-be65-4c73-a93b-d1236ebd677e" targetNamespace="http://schemas.microsoft.com/office/2006/metadata/properties" ma:root="true" ma:fieldsID="27df39e3e7036dff54f89ddd5805ce72" ns1:_="" ns2:_="" ns3:_="" ns4:_="">
     <xsd:import namespace="http://schemas.microsoft.com/sharepoint/v3"/>
@@ -20576,27 +21550,19 @@
 </ct:contentTypeSchema>
 </file>
 
-<file path=customXml/item3.xml><?xml version="1.0" encoding="utf-8"?>
-<p:properties xmlns:p="http://schemas.microsoft.com/office/2006/metadata/properties" xmlns:xsi="http://www.w3.org/2001/XMLSchema-instance" xmlns:pc="http://schemas.microsoft.com/office/infopath/2007/PartnerControls">
-  <documentManagement>
-    <_ip_UnifiedCompliancePolicyUIAction xmlns="http://schemas.microsoft.com/sharepoint/v3" xsi:nil="true"/>
-    <Image xmlns="71af3243-3dd4-4a8d-8c0d-dd76da1f02a5">
-      <Url xsi:nil="true"/>
-      <Description xsi:nil="true"/>
-    </Image>
-    <Status xmlns="71af3243-3dd4-4a8d-8c0d-dd76da1f02a5">Not started</Status>
-    <Background xmlns="71af3243-3dd4-4a8d-8c0d-dd76da1f02a5">false</Background>
-    <_ip_UnifiedCompliancePolicyProperties xmlns="http://schemas.microsoft.com/sharepoint/v3" xsi:nil="true"/>
-    <ImageTagsTaxHTField xmlns="71af3243-3dd4-4a8d-8c0d-dd76da1f02a5">
-      <Terms xmlns="http://schemas.microsoft.com/office/infopath/2007/PartnerControls"/>
-    </ImageTagsTaxHTField>
-    <TaxCatchAll xmlns="230e9df3-be65-4c73-a93b-d1236ebd677e" xsi:nil="true"/>
-    <MediaServiceKeyPoints xmlns="71af3243-3dd4-4a8d-8c0d-dd76da1f02a5" xsi:nil="true"/>
-  </documentManagement>
-</p:properties>
+<file path=customXml/itemProps1.xml><?xml version="1.0" encoding="utf-8"?>
+<ds:datastoreItem xmlns:ds="http://schemas.openxmlformats.org/officeDocument/2006/customXml" ds:itemID="{BEFFFA3F-0FB5-4ED3-8906-A15B16577F44}">
+  <ds:schemaRefs>
+    <ds:schemaRef ds:uri="http://schemas.microsoft.com/office/2006/metadata/properties"/>
+    <ds:schemaRef ds:uri="http://schemas.microsoft.com/office/infopath/2007/PartnerControls"/>
+    <ds:schemaRef ds:uri="http://schemas.microsoft.com/sharepoint/v3"/>
+    <ds:schemaRef ds:uri="71af3243-3dd4-4a8d-8c0d-dd76da1f02a5"/>
+    <ds:schemaRef ds:uri="230e9df3-be65-4c73-a93b-d1236ebd677e"/>
+  </ds:schemaRefs>
+</ds:datastoreItem>
 </file>
 
-<file path=customXml/itemProps1.xml><?xml version="1.0" encoding="utf-8"?>
+<file path=customXml/itemProps2.xml><?xml version="1.0" encoding="utf-8"?>
 <ds:datastoreItem xmlns:ds="http://schemas.openxmlformats.org/officeDocument/2006/customXml" ds:itemID="{6966C46A-DC57-4209-80CD-9FE6C93151FF}">
   <ds:schemaRefs>
     <ds:schemaRef ds:uri="http://schemas.microsoft.com/sharepoint/v3/contenttype/forms"/>
@@ -20604,7 +21570,7 @@
 </ds:datastoreItem>
 </file>
 
-<file path=customXml/itemProps2.xml><?xml version="1.0" encoding="utf-8"?>
+<file path=customXml/itemProps3.xml><?xml version="1.0" encoding="utf-8"?>
 <ds:datastoreItem xmlns:ds="http://schemas.openxmlformats.org/officeDocument/2006/customXml" ds:itemID="{4E18436D-DA32-4E27-AC64-8FFEDA5218F9}">
   <ds:schemaRefs>
     <ds:schemaRef ds:uri="http://schemas.microsoft.com/office/2006/metadata/contentType"/>
@@ -20625,18 +21591,6 @@
 </ds:datastoreItem>
 </file>
 
-<file path=customXml/itemProps3.xml><?xml version="1.0" encoding="utf-8"?>
-<ds:datastoreItem xmlns:ds="http://schemas.openxmlformats.org/officeDocument/2006/customXml" ds:itemID="{BEFFFA3F-0FB5-4ED3-8906-A15B16577F44}">
-  <ds:schemaRefs>
-    <ds:schemaRef ds:uri="http://schemas.microsoft.com/office/2006/metadata/properties"/>
-    <ds:schemaRef ds:uri="http://schemas.microsoft.com/office/infopath/2007/PartnerControls"/>
-    <ds:schemaRef ds:uri="http://schemas.microsoft.com/sharepoint/v3"/>
-    <ds:schemaRef ds:uri="71af3243-3dd4-4a8d-8c0d-dd76da1f02a5"/>
-    <ds:schemaRef ds:uri="230e9df3-be65-4c73-a93b-d1236ebd677e"/>
-  </ds:schemaRefs>
-</ds:datastoreItem>
-</file>
-
 <file path=docMetadata/LabelInfo.xml><?xml version="1.0" encoding="utf-8"?>
 <clbl:labelList xmlns:clbl="http://schemas.microsoft.com/office/2020/mipLabelMetadata"/>
 </file>